--- a/docs/pptx/entire/ritu-entire-linsubhr-ratio-hosp4.pptx
+++ b/docs/pptx/entire/ritu-entire-linsubhr-ratio-hosp4.pptx
@@ -2960,542 +2960,539 @@
           <p:spPr>
             <a:xfrm>
               <a:off x="1172049" y="2073503"/>
-              <a:ext cx="7090630" cy="3446589"/>
+              <a:ext cx="7090630" cy="3446733"/>
             </a:xfrm>
             <a:custGeom>
               <a:avLst/>
               <a:pathLst>
-                <a:path w="7090630" h="3446589">
+                <a:path w="7090630" h="3446733">
                   <a:moveTo>
-                    <a:pt x="1718154" y="0"/>
+                    <a:pt x="1720290" y="0"/>
                   </a:moveTo>
                   <a:lnTo>
-                    <a:pt x="1718940" y="2384"/>
-                  </a:lnTo>
-                  <a:lnTo>
-                    <a:pt x="1790563" y="206872"/>
-                  </a:lnTo>
-                  <a:lnTo>
-                    <a:pt x="1862185" y="399348"/>
-                  </a:lnTo>
-                  <a:lnTo>
-                    <a:pt x="1933808" y="580519"/>
-                  </a:lnTo>
-                  <a:lnTo>
-                    <a:pt x="2005430" y="751049"/>
-                  </a:lnTo>
-                  <a:lnTo>
-                    <a:pt x="2077053" y="911562"/>
-                  </a:lnTo>
-                  <a:lnTo>
-                    <a:pt x="2148675" y="1062646"/>
-                  </a:lnTo>
-                  <a:lnTo>
-                    <a:pt x="2220298" y="1204857"/>
-                  </a:lnTo>
-                  <a:lnTo>
-                    <a:pt x="2291920" y="1338714"/>
-                  </a:lnTo>
-                  <a:lnTo>
-                    <a:pt x="2363543" y="1464708"/>
-                  </a:lnTo>
-                  <a:lnTo>
-                    <a:pt x="2435165" y="1583302"/>
-                  </a:lnTo>
-                  <a:lnTo>
-                    <a:pt x="2506788" y="1694930"/>
-                  </a:lnTo>
-                  <a:lnTo>
-                    <a:pt x="2578410" y="1800002"/>
-                  </a:lnTo>
-                  <a:lnTo>
-                    <a:pt x="2650033" y="1898901"/>
-                  </a:lnTo>
-                  <a:lnTo>
-                    <a:pt x="2721655" y="1991992"/>
-                  </a:lnTo>
-                  <a:lnTo>
-                    <a:pt x="2793278" y="2079614"/>
-                  </a:lnTo>
-                  <a:lnTo>
-                    <a:pt x="2864901" y="2162090"/>
-                  </a:lnTo>
-                  <a:lnTo>
-                    <a:pt x="2936523" y="2239721"/>
-                  </a:lnTo>
-                  <a:lnTo>
-                    <a:pt x="3008146" y="2312793"/>
-                  </a:lnTo>
-                  <a:lnTo>
-                    <a:pt x="3079768" y="2381572"/>
-                  </a:lnTo>
-                  <a:lnTo>
-                    <a:pt x="3151391" y="2446311"/>
-                  </a:lnTo>
-                  <a:lnTo>
-                    <a:pt x="3223013" y="2507248"/>
-                  </a:lnTo>
-                  <a:lnTo>
-                    <a:pt x="3294636" y="2564606"/>
-                  </a:lnTo>
-                  <a:lnTo>
-                    <a:pt x="3366258" y="2618594"/>
-                  </a:lnTo>
-                  <a:lnTo>
-                    <a:pt x="3437881" y="2655241"/>
-                  </a:lnTo>
-                  <a:lnTo>
-                    <a:pt x="3509503" y="2658386"/>
-                  </a:lnTo>
-                  <a:lnTo>
-                    <a:pt x="3581126" y="2661519"/>
-                  </a:lnTo>
-                  <a:lnTo>
-                    <a:pt x="3652748" y="2664640"/>
-                  </a:lnTo>
-                  <a:lnTo>
-                    <a:pt x="3724371" y="2667749"/>
-                  </a:lnTo>
-                  <a:lnTo>
-                    <a:pt x="3795993" y="2670846"/>
-                  </a:lnTo>
-                  <a:lnTo>
-                    <a:pt x="3867616" y="2673931"/>
-                  </a:lnTo>
-                  <a:lnTo>
-                    <a:pt x="3939238" y="2677005"/>
-                  </a:lnTo>
-                  <a:lnTo>
-                    <a:pt x="4010861" y="2680067"/>
-                  </a:lnTo>
-                  <a:lnTo>
-                    <a:pt x="4082483" y="2683118"/>
-                  </a:lnTo>
-                  <a:lnTo>
-                    <a:pt x="4154106" y="2686157"/>
-                  </a:lnTo>
-                  <a:lnTo>
-                    <a:pt x="4225729" y="2689184"/>
-                  </a:lnTo>
-                  <a:lnTo>
-                    <a:pt x="4297351" y="2692200"/>
-                  </a:lnTo>
-                  <a:lnTo>
-                    <a:pt x="4368974" y="2695204"/>
-                  </a:lnTo>
-                  <a:lnTo>
-                    <a:pt x="4440596" y="2698197"/>
-                  </a:lnTo>
-                  <a:lnTo>
-                    <a:pt x="4512219" y="2701179"/>
-                  </a:lnTo>
-                  <a:lnTo>
-                    <a:pt x="4583841" y="2704149"/>
-                  </a:lnTo>
-                  <a:lnTo>
-                    <a:pt x="4655464" y="2707108"/>
-                  </a:lnTo>
-                  <a:lnTo>
-                    <a:pt x="4727086" y="2710056"/>
-                  </a:lnTo>
-                  <a:lnTo>
-                    <a:pt x="4798709" y="2712993"/>
-                  </a:lnTo>
-                  <a:lnTo>
-                    <a:pt x="4870331" y="2715918"/>
-                  </a:lnTo>
-                  <a:lnTo>
-                    <a:pt x="4941954" y="2718833"/>
-                  </a:lnTo>
-                  <a:lnTo>
-                    <a:pt x="5013576" y="2721736"/>
-                  </a:lnTo>
-                  <a:lnTo>
-                    <a:pt x="5085199" y="2724628"/>
-                  </a:lnTo>
-                  <a:lnTo>
-                    <a:pt x="5156821" y="2727510"/>
-                  </a:lnTo>
-                  <a:lnTo>
-                    <a:pt x="5228444" y="2730380"/>
-                  </a:lnTo>
-                  <a:lnTo>
-                    <a:pt x="5300066" y="2733239"/>
-                  </a:lnTo>
-                  <a:lnTo>
-                    <a:pt x="5371689" y="2736088"/>
-                  </a:lnTo>
-                  <a:lnTo>
-                    <a:pt x="5443311" y="2738926"/>
-                  </a:lnTo>
-                  <a:lnTo>
-                    <a:pt x="5514934" y="2741753"/>
-                  </a:lnTo>
-                  <a:lnTo>
-                    <a:pt x="5586557" y="2744569"/>
-                  </a:lnTo>
-                  <a:lnTo>
-                    <a:pt x="5658179" y="2747375"/>
-                  </a:lnTo>
-                  <a:lnTo>
-                    <a:pt x="5729802" y="2750170"/>
-                  </a:lnTo>
-                  <a:lnTo>
-                    <a:pt x="5801424" y="2752954"/>
-                  </a:lnTo>
-                  <a:lnTo>
-                    <a:pt x="5873047" y="2755728"/>
-                  </a:lnTo>
-                  <a:lnTo>
-                    <a:pt x="5944669" y="2758491"/>
-                  </a:lnTo>
-                  <a:lnTo>
-                    <a:pt x="6016292" y="2761244"/>
-                  </a:lnTo>
-                  <a:lnTo>
-                    <a:pt x="6087914" y="2763987"/>
-                  </a:lnTo>
-                  <a:lnTo>
-                    <a:pt x="6159537" y="2766718"/>
-                  </a:lnTo>
-                  <a:lnTo>
-                    <a:pt x="6231159" y="2769440"/>
-                  </a:lnTo>
-                  <a:lnTo>
-                    <a:pt x="6302782" y="2772151"/>
-                  </a:lnTo>
-                  <a:lnTo>
-                    <a:pt x="6374404" y="2774852"/>
-                  </a:lnTo>
-                  <a:lnTo>
-                    <a:pt x="6446027" y="2777543"/>
-                  </a:lnTo>
-                  <a:lnTo>
-                    <a:pt x="6517649" y="2780223"/>
-                  </a:lnTo>
-                  <a:lnTo>
-                    <a:pt x="6589272" y="2782894"/>
-                  </a:lnTo>
-                  <a:lnTo>
-                    <a:pt x="6660894" y="2785554"/>
-                  </a:lnTo>
-                  <a:lnTo>
-                    <a:pt x="6732517" y="2788204"/>
-                  </a:lnTo>
-                  <a:lnTo>
-                    <a:pt x="6804139" y="2790844"/>
-                  </a:lnTo>
-                  <a:lnTo>
-                    <a:pt x="6875762" y="2793474"/>
-                  </a:lnTo>
-                  <a:lnTo>
-                    <a:pt x="6947385" y="2796094"/>
-                  </a:lnTo>
-                  <a:lnTo>
-                    <a:pt x="7019007" y="2798704"/>
-                  </a:lnTo>
-                  <a:lnTo>
-                    <a:pt x="7090630" y="2801304"/>
-                  </a:lnTo>
-                  <a:lnTo>
-                    <a:pt x="7090630" y="3446589"/>
-                  </a:lnTo>
-                  <a:lnTo>
-                    <a:pt x="7019007" y="3444270"/>
-                  </a:lnTo>
-                  <a:lnTo>
-                    <a:pt x="6947385" y="3441807"/>
-                  </a:lnTo>
-                  <a:lnTo>
-                    <a:pt x="6875762" y="3439190"/>
-                  </a:lnTo>
-                  <a:lnTo>
-                    <a:pt x="6804139" y="3436409"/>
-                  </a:lnTo>
-                  <a:lnTo>
-                    <a:pt x="6732517" y="3433455"/>
-                  </a:lnTo>
-                  <a:lnTo>
-                    <a:pt x="6660894" y="3430317"/>
-                  </a:lnTo>
-                  <a:lnTo>
-                    <a:pt x="6589272" y="3426983"/>
-                  </a:lnTo>
-                  <a:lnTo>
-                    <a:pt x="6517649" y="3423441"/>
-                  </a:lnTo>
-                  <a:lnTo>
-                    <a:pt x="6446027" y="3419677"/>
-                  </a:lnTo>
-                  <a:lnTo>
-                    <a:pt x="6374404" y="3415679"/>
-                  </a:lnTo>
-                  <a:lnTo>
-                    <a:pt x="6302782" y="3411432"/>
-                  </a:lnTo>
-                  <a:lnTo>
-                    <a:pt x="6231159" y="3406919"/>
-                  </a:lnTo>
-                  <a:lnTo>
-                    <a:pt x="6159537" y="3402125"/>
-                  </a:lnTo>
-                  <a:lnTo>
-                    <a:pt x="6087914" y="3397031"/>
-                  </a:lnTo>
-                  <a:lnTo>
-                    <a:pt x="6016292" y="3391620"/>
-                  </a:lnTo>
-                  <a:lnTo>
-                    <a:pt x="5944669" y="3385871"/>
-                  </a:lnTo>
-                  <a:lnTo>
-                    <a:pt x="5873047" y="3379763"/>
-                  </a:lnTo>
-                  <a:lnTo>
-                    <a:pt x="5801424" y="3373274"/>
-                  </a:lnTo>
-                  <a:lnTo>
-                    <a:pt x="5729802" y="3366381"/>
-                  </a:lnTo>
-                  <a:lnTo>
-                    <a:pt x="5658179" y="3359057"/>
-                  </a:lnTo>
-                  <a:lnTo>
-                    <a:pt x="5586557" y="3351275"/>
-                  </a:lnTo>
-                  <a:lnTo>
-                    <a:pt x="5514934" y="3343009"/>
-                  </a:lnTo>
-                  <a:lnTo>
-                    <a:pt x="5443311" y="3334226"/>
-                  </a:lnTo>
-                  <a:lnTo>
-                    <a:pt x="5371689" y="3324896"/>
-                  </a:lnTo>
-                  <a:lnTo>
-                    <a:pt x="5300066" y="3314983"/>
-                  </a:lnTo>
-                  <a:lnTo>
-                    <a:pt x="5228444" y="3304452"/>
-                  </a:lnTo>
-                  <a:lnTo>
-                    <a:pt x="5156821" y="3293263"/>
-                  </a:lnTo>
-                  <a:lnTo>
-                    <a:pt x="5085199" y="3281376"/>
-                  </a:lnTo>
-                  <a:lnTo>
-                    <a:pt x="5013576" y="3268748"/>
-                  </a:lnTo>
-                  <a:lnTo>
-                    <a:pt x="4941954" y="3255331"/>
-                  </a:lnTo>
-                  <a:lnTo>
-                    <a:pt x="4870331" y="3241077"/>
-                  </a:lnTo>
-                  <a:lnTo>
-                    <a:pt x="4798709" y="3225934"/>
-                  </a:lnTo>
-                  <a:lnTo>
-                    <a:pt x="4727086" y="3209845"/>
-                  </a:lnTo>
-                  <a:lnTo>
-                    <a:pt x="4655464" y="3192753"/>
-                  </a:lnTo>
-                  <a:lnTo>
-                    <a:pt x="4583841" y="3174594"/>
-                  </a:lnTo>
-                  <a:lnTo>
-                    <a:pt x="4512219" y="3155302"/>
-                  </a:lnTo>
-                  <a:lnTo>
-                    <a:pt x="4440596" y="3134806"/>
-                  </a:lnTo>
-                  <a:lnTo>
-                    <a:pt x="4368974" y="3113031"/>
-                  </a:lnTo>
-                  <a:lnTo>
-                    <a:pt x="4297351" y="3089897"/>
-                  </a:lnTo>
-                  <a:lnTo>
-                    <a:pt x="4225729" y="3065319"/>
-                  </a:lnTo>
-                  <a:lnTo>
-                    <a:pt x="4154106" y="3039208"/>
-                  </a:lnTo>
-                  <a:lnTo>
-                    <a:pt x="4082483" y="3011468"/>
-                  </a:lnTo>
-                  <a:lnTo>
-                    <a:pt x="4010861" y="2981996"/>
-                  </a:lnTo>
-                  <a:lnTo>
-                    <a:pt x="3939238" y="2950685"/>
-                  </a:lnTo>
-                  <a:lnTo>
-                    <a:pt x="3867616" y="2917420"/>
-                  </a:lnTo>
-                  <a:lnTo>
-                    <a:pt x="3795993" y="2882080"/>
-                  </a:lnTo>
-                  <a:lnTo>
-                    <a:pt x="3724371" y="2844533"/>
-                  </a:lnTo>
-                  <a:lnTo>
-                    <a:pt x="3652748" y="2804644"/>
-                  </a:lnTo>
-                  <a:lnTo>
-                    <a:pt x="3581126" y="2762266"/>
-                  </a:lnTo>
-                  <a:lnTo>
-                    <a:pt x="3509503" y="2717244"/>
-                  </a:lnTo>
-                  <a:lnTo>
-                    <a:pt x="3437881" y="2669411"/>
-                  </a:lnTo>
-                  <a:lnTo>
-                    <a:pt x="3366258" y="2652085"/>
-                  </a:lnTo>
-                  <a:lnTo>
-                    <a:pt x="3294636" y="2648916"/>
-                  </a:lnTo>
-                  <a:lnTo>
-                    <a:pt x="3223013" y="2645735"/>
-                  </a:lnTo>
-                  <a:lnTo>
-                    <a:pt x="3151391" y="2642542"/>
-                  </a:lnTo>
-                  <a:lnTo>
-                    <a:pt x="3079768" y="2639337"/>
-                  </a:lnTo>
-                  <a:lnTo>
-                    <a:pt x="3008146" y="2636120"/>
-                  </a:lnTo>
-                  <a:lnTo>
-                    <a:pt x="2936523" y="2632891"/>
-                  </a:lnTo>
-                  <a:lnTo>
-                    <a:pt x="2864901" y="2629649"/>
-                  </a:lnTo>
-                  <a:lnTo>
-                    <a:pt x="2793278" y="2626395"/>
-                  </a:lnTo>
-                  <a:lnTo>
-                    <a:pt x="2721655" y="2623128"/>
-                  </a:lnTo>
-                  <a:lnTo>
-                    <a:pt x="2650033" y="2619849"/>
-                  </a:lnTo>
-                  <a:lnTo>
-                    <a:pt x="2578410" y="2616557"/>
-                  </a:lnTo>
-                  <a:lnTo>
-                    <a:pt x="2506788" y="2613253"/>
-                  </a:lnTo>
-                  <a:lnTo>
-                    <a:pt x="2435165" y="2609937"/>
-                  </a:lnTo>
-                  <a:lnTo>
-                    <a:pt x="2363543" y="2606607"/>
-                  </a:lnTo>
-                  <a:lnTo>
-                    <a:pt x="2291920" y="2603265"/>
-                  </a:lnTo>
-                  <a:lnTo>
-                    <a:pt x="2220298" y="2599911"/>
-                  </a:lnTo>
-                  <a:lnTo>
-                    <a:pt x="2148675" y="2596543"/>
-                  </a:lnTo>
-                  <a:lnTo>
-                    <a:pt x="2077053" y="2593163"/>
-                  </a:lnTo>
-                  <a:lnTo>
-                    <a:pt x="2005430" y="2589770"/>
-                  </a:lnTo>
-                  <a:lnTo>
-                    <a:pt x="1933808" y="2586364"/>
-                  </a:lnTo>
-                  <a:lnTo>
-                    <a:pt x="1862185" y="2582945"/>
-                  </a:lnTo>
-                  <a:lnTo>
-                    <a:pt x="1790563" y="2579512"/>
-                  </a:lnTo>
-                  <a:lnTo>
-                    <a:pt x="1718940" y="2576067"/>
-                  </a:lnTo>
-                  <a:lnTo>
-                    <a:pt x="1647318" y="2572609"/>
-                  </a:lnTo>
-                  <a:lnTo>
-                    <a:pt x="1575695" y="2569137"/>
-                  </a:lnTo>
-                  <a:lnTo>
-                    <a:pt x="1504073" y="2565653"/>
-                  </a:lnTo>
-                  <a:lnTo>
-                    <a:pt x="1432450" y="2562155"/>
-                  </a:lnTo>
-                  <a:lnTo>
-                    <a:pt x="1360827" y="2558643"/>
-                  </a:lnTo>
-                  <a:lnTo>
-                    <a:pt x="1289205" y="2555119"/>
-                  </a:lnTo>
-                  <a:lnTo>
-                    <a:pt x="1217582" y="2551580"/>
-                  </a:lnTo>
-                  <a:lnTo>
-                    <a:pt x="1145960" y="2548029"/>
-                  </a:lnTo>
-                  <a:lnTo>
-                    <a:pt x="1074337" y="2544464"/>
-                  </a:lnTo>
-                  <a:lnTo>
-                    <a:pt x="1002715" y="2540885"/>
-                  </a:lnTo>
-                  <a:lnTo>
-                    <a:pt x="931092" y="2537293"/>
-                  </a:lnTo>
-                  <a:lnTo>
-                    <a:pt x="859470" y="2533686"/>
-                  </a:lnTo>
-                  <a:lnTo>
-                    <a:pt x="787847" y="2530067"/>
-                  </a:lnTo>
-                  <a:lnTo>
-                    <a:pt x="716225" y="2526433"/>
-                  </a:lnTo>
-                  <a:lnTo>
-                    <a:pt x="644602" y="2522786"/>
-                  </a:lnTo>
-                  <a:lnTo>
-                    <a:pt x="572980" y="2519124"/>
-                  </a:lnTo>
-                  <a:lnTo>
-                    <a:pt x="501357" y="2515449"/>
-                  </a:lnTo>
-                  <a:lnTo>
-                    <a:pt x="429735" y="2511760"/>
-                  </a:lnTo>
-                  <a:lnTo>
-                    <a:pt x="358112" y="2508056"/>
-                  </a:lnTo>
-                  <a:lnTo>
-                    <a:pt x="286490" y="2504339"/>
-                  </a:lnTo>
-                  <a:lnTo>
-                    <a:pt x="214867" y="2500607"/>
-                  </a:lnTo>
-                  <a:lnTo>
-                    <a:pt x="143245" y="2496861"/>
-                  </a:lnTo>
-                  <a:lnTo>
-                    <a:pt x="71622" y="2493101"/>
-                  </a:lnTo>
-                  <a:lnTo>
-                    <a:pt x="0" y="2489327"/>
+                    <a:pt x="1790563" y="201238"/>
+                  </a:lnTo>
+                  <a:lnTo>
+                    <a:pt x="1862185" y="394279"/>
+                  </a:lnTo>
+                  <a:lnTo>
+                    <a:pt x="1933808" y="575968"/>
+                  </a:lnTo>
+                  <a:lnTo>
+                    <a:pt x="2005430" y="746972"/>
+                  </a:lnTo>
+                  <a:lnTo>
+                    <a:pt x="2077053" y="907919"/>
+                  </a:lnTo>
+                  <a:lnTo>
+                    <a:pt x="2148675" y="1059401"/>
+                  </a:lnTo>
+                  <a:lnTo>
+                    <a:pt x="2220298" y="1201975"/>
+                  </a:lnTo>
+                  <a:lnTo>
+                    <a:pt x="2291920" y="1336164"/>
+                  </a:lnTo>
+                  <a:lnTo>
+                    <a:pt x="2363543" y="1462461"/>
+                  </a:lnTo>
+                  <a:lnTo>
+                    <a:pt x="2435165" y="1581331"/>
+                  </a:lnTo>
+                  <a:lnTo>
+                    <a:pt x="2506788" y="1693211"/>
+                  </a:lnTo>
+                  <a:lnTo>
+                    <a:pt x="2578410" y="1798511"/>
+                  </a:lnTo>
+                  <a:lnTo>
+                    <a:pt x="2650033" y="1897618"/>
+                  </a:lnTo>
+                  <a:lnTo>
+                    <a:pt x="2721655" y="1990897"/>
+                  </a:lnTo>
+                  <a:lnTo>
+                    <a:pt x="2793278" y="2078690"/>
+                  </a:lnTo>
+                  <a:lnTo>
+                    <a:pt x="2864901" y="2161320"/>
+                  </a:lnTo>
+                  <a:lnTo>
+                    <a:pt x="2936523" y="2239091"/>
+                  </a:lnTo>
+                  <a:lnTo>
+                    <a:pt x="3008146" y="2312288"/>
+                  </a:lnTo>
+                  <a:lnTo>
+                    <a:pt x="3079768" y="2381180"/>
+                  </a:lnTo>
+                  <a:lnTo>
+                    <a:pt x="3151391" y="2446021"/>
+                  </a:lnTo>
+                  <a:lnTo>
+                    <a:pt x="3223013" y="2507049"/>
+                  </a:lnTo>
+                  <a:lnTo>
+                    <a:pt x="3294636" y="2564488"/>
+                  </a:lnTo>
+                  <a:lnTo>
+                    <a:pt x="3366258" y="2618548"/>
+                  </a:lnTo>
+                  <a:lnTo>
+                    <a:pt x="3437881" y="2655250"/>
+                  </a:lnTo>
+                  <a:lnTo>
+                    <a:pt x="3509503" y="2658423"/>
+                  </a:lnTo>
+                  <a:lnTo>
+                    <a:pt x="3581126" y="2661584"/>
+                  </a:lnTo>
+                  <a:lnTo>
+                    <a:pt x="3652748" y="2664733"/>
+                  </a:lnTo>
+                  <a:lnTo>
+                    <a:pt x="3724371" y="2667869"/>
+                  </a:lnTo>
+                  <a:lnTo>
+                    <a:pt x="3795993" y="2670994"/>
+                  </a:lnTo>
+                  <a:lnTo>
+                    <a:pt x="3867616" y="2674107"/>
+                  </a:lnTo>
+                  <a:lnTo>
+                    <a:pt x="3939238" y="2677208"/>
+                  </a:lnTo>
+                  <a:lnTo>
+                    <a:pt x="4010861" y="2680297"/>
+                  </a:lnTo>
+                  <a:lnTo>
+                    <a:pt x="4082483" y="2683374"/>
+                  </a:lnTo>
+                  <a:lnTo>
+                    <a:pt x="4154106" y="2686439"/>
+                  </a:lnTo>
+                  <a:lnTo>
+                    <a:pt x="4225729" y="2689493"/>
+                  </a:lnTo>
+                  <a:lnTo>
+                    <a:pt x="4297351" y="2692535"/>
+                  </a:lnTo>
+                  <a:lnTo>
+                    <a:pt x="4368974" y="2695565"/>
+                  </a:lnTo>
+                  <a:lnTo>
+                    <a:pt x="4440596" y="2698583"/>
+                  </a:lnTo>
+                  <a:lnTo>
+                    <a:pt x="4512219" y="2701590"/>
+                  </a:lnTo>
+                  <a:lnTo>
+                    <a:pt x="4583841" y="2704586"/>
+                  </a:lnTo>
+                  <a:lnTo>
+                    <a:pt x="4655464" y="2707570"/>
+                  </a:lnTo>
+                  <a:lnTo>
+                    <a:pt x="4727086" y="2710543"/>
+                  </a:lnTo>
+                  <a:lnTo>
+                    <a:pt x="4798709" y="2713504"/>
+                  </a:lnTo>
+                  <a:lnTo>
+                    <a:pt x="4870331" y="2716454"/>
+                  </a:lnTo>
+                  <a:lnTo>
+                    <a:pt x="4941954" y="2719392"/>
+                  </a:lnTo>
+                  <a:lnTo>
+                    <a:pt x="5013576" y="2722320"/>
+                  </a:lnTo>
+                  <a:lnTo>
+                    <a:pt x="5085199" y="2725236"/>
+                  </a:lnTo>
+                  <a:lnTo>
+                    <a:pt x="5156821" y="2728141"/>
+                  </a:lnTo>
+                  <a:lnTo>
+                    <a:pt x="5228444" y="2731035"/>
+                  </a:lnTo>
+                  <a:lnTo>
+                    <a:pt x="5300066" y="2733918"/>
+                  </a:lnTo>
+                  <a:lnTo>
+                    <a:pt x="5371689" y="2736789"/>
+                  </a:lnTo>
+                  <a:lnTo>
+                    <a:pt x="5443311" y="2739650"/>
+                  </a:lnTo>
+                  <a:lnTo>
+                    <a:pt x="5514934" y="2742500"/>
+                  </a:lnTo>
+                  <a:lnTo>
+                    <a:pt x="5586557" y="2745339"/>
+                  </a:lnTo>
+                  <a:lnTo>
+                    <a:pt x="5658179" y="2748167"/>
+                  </a:lnTo>
+                  <a:lnTo>
+                    <a:pt x="5729802" y="2750984"/>
+                  </a:lnTo>
+                  <a:lnTo>
+                    <a:pt x="5801424" y="2753790"/>
+                  </a:lnTo>
+                  <a:lnTo>
+                    <a:pt x="5873047" y="2756586"/>
+                  </a:lnTo>
+                  <a:lnTo>
+                    <a:pt x="5944669" y="2759371"/>
+                  </a:lnTo>
+                  <a:lnTo>
+                    <a:pt x="6016292" y="2762145"/>
+                  </a:lnTo>
+                  <a:lnTo>
+                    <a:pt x="6087914" y="2764909"/>
+                  </a:lnTo>
+                  <a:lnTo>
+                    <a:pt x="6159537" y="2767662"/>
+                  </a:lnTo>
+                  <a:lnTo>
+                    <a:pt x="6231159" y="2770404"/>
+                  </a:lnTo>
+                  <a:lnTo>
+                    <a:pt x="6302782" y="2773136"/>
+                  </a:lnTo>
+                  <a:lnTo>
+                    <a:pt x="6374404" y="2775858"/>
+                  </a:lnTo>
+                  <a:lnTo>
+                    <a:pt x="6446027" y="2778569"/>
+                  </a:lnTo>
+                  <a:lnTo>
+                    <a:pt x="6517649" y="2781270"/>
+                  </a:lnTo>
+                  <a:lnTo>
+                    <a:pt x="6589272" y="2783960"/>
+                  </a:lnTo>
+                  <a:lnTo>
+                    <a:pt x="6660894" y="2786640"/>
+                  </a:lnTo>
+                  <a:lnTo>
+                    <a:pt x="6732517" y="2789310"/>
+                  </a:lnTo>
+                  <a:lnTo>
+                    <a:pt x="6804139" y="2791970"/>
+                  </a:lnTo>
+                  <a:lnTo>
+                    <a:pt x="6875762" y="2794619"/>
+                  </a:lnTo>
+                  <a:lnTo>
+                    <a:pt x="6947385" y="2797258"/>
+                  </a:lnTo>
+                  <a:lnTo>
+                    <a:pt x="7019007" y="2799887"/>
+                  </a:lnTo>
+                  <a:lnTo>
+                    <a:pt x="7090630" y="2802506"/>
+                  </a:lnTo>
+                  <a:lnTo>
+                    <a:pt x="7090630" y="3446733"/>
+                  </a:lnTo>
+                  <a:lnTo>
+                    <a:pt x="7019007" y="3444420"/>
+                  </a:lnTo>
+                  <a:lnTo>
+                    <a:pt x="6947385" y="3441963"/>
+                  </a:lnTo>
+                  <a:lnTo>
+                    <a:pt x="6875762" y="3439352"/>
+                  </a:lnTo>
+                  <a:lnTo>
+                    <a:pt x="6804139" y="3436579"/>
+                  </a:lnTo>
+                  <a:lnTo>
+                    <a:pt x="6732517" y="3433631"/>
+                  </a:lnTo>
+                  <a:lnTo>
+                    <a:pt x="6660894" y="3430500"/>
+                  </a:lnTo>
+                  <a:lnTo>
+                    <a:pt x="6589272" y="3427173"/>
+                  </a:lnTo>
+                  <a:lnTo>
+                    <a:pt x="6517649" y="3423638"/>
+                  </a:lnTo>
+                  <a:lnTo>
+                    <a:pt x="6446027" y="3419882"/>
+                  </a:lnTo>
+                  <a:lnTo>
+                    <a:pt x="6374404" y="3415892"/>
+                  </a:lnTo>
+                  <a:lnTo>
+                    <a:pt x="6302782" y="3411652"/>
+                  </a:lnTo>
+                  <a:lnTo>
+                    <a:pt x="6231159" y="3407147"/>
+                  </a:lnTo>
+                  <a:lnTo>
+                    <a:pt x="6159537" y="3402361"/>
+                  </a:lnTo>
+                  <a:lnTo>
+                    <a:pt x="6087914" y="3397276"/>
+                  </a:lnTo>
+                  <a:lnTo>
+                    <a:pt x="6016292" y="3391873"/>
+                  </a:lnTo>
+                  <a:lnTo>
+                    <a:pt x="5944669" y="3386132"/>
+                  </a:lnTo>
+                  <a:lnTo>
+                    <a:pt x="5873047" y="3380033"/>
+                  </a:lnTo>
+                  <a:lnTo>
+                    <a:pt x="5801424" y="3373552"/>
+                  </a:lnTo>
+                  <a:lnTo>
+                    <a:pt x="5729802" y="3366667"/>
+                  </a:lnTo>
+                  <a:lnTo>
+                    <a:pt x="5658179" y="3359352"/>
+                  </a:lnTo>
+                  <a:lnTo>
+                    <a:pt x="5586557" y="3351579"/>
+                  </a:lnTo>
+                  <a:lnTo>
+                    <a:pt x="5514934" y="3343321"/>
+                  </a:lnTo>
+                  <a:lnTo>
+                    <a:pt x="5443311" y="3334546"/>
+                  </a:lnTo>
+                  <a:lnTo>
+                    <a:pt x="5371689" y="3325224"/>
+                  </a:lnTo>
+                  <a:lnTo>
+                    <a:pt x="5300066" y="3315319"/>
+                  </a:lnTo>
+                  <a:lnTo>
+                    <a:pt x="5228444" y="3304795"/>
+                  </a:lnTo>
+                  <a:lnTo>
+                    <a:pt x="5156821" y="3293613"/>
+                  </a:lnTo>
+                  <a:lnTo>
+                    <a:pt x="5085199" y="3281733"/>
+                  </a:lnTo>
+                  <a:lnTo>
+                    <a:pt x="5013576" y="3269110"/>
+                  </a:lnTo>
+                  <a:lnTo>
+                    <a:pt x="4941954" y="3255699"/>
+                  </a:lnTo>
+                  <a:lnTo>
+                    <a:pt x="4870331" y="3241450"/>
+                  </a:lnTo>
+                  <a:lnTo>
+                    <a:pt x="4798709" y="3226310"/>
+                  </a:lnTo>
+                  <a:lnTo>
+                    <a:pt x="4727086" y="3210225"/>
+                  </a:lnTo>
+                  <a:lnTo>
+                    <a:pt x="4655464" y="3193134"/>
+                  </a:lnTo>
+                  <a:lnTo>
+                    <a:pt x="4583841" y="3174975"/>
+                  </a:lnTo>
+                  <a:lnTo>
+                    <a:pt x="4512219" y="3155682"/>
+                  </a:lnTo>
+                  <a:lnTo>
+                    <a:pt x="4440596" y="3135183"/>
+                  </a:lnTo>
+                  <a:lnTo>
+                    <a:pt x="4368974" y="3113404"/>
+                  </a:lnTo>
+                  <a:lnTo>
+                    <a:pt x="4297351" y="3090264"/>
+                  </a:lnTo>
+                  <a:lnTo>
+                    <a:pt x="4225729" y="3065677"/>
+                  </a:lnTo>
+                  <a:lnTo>
+                    <a:pt x="4154106" y="3039555"/>
+                  </a:lnTo>
+                  <a:lnTo>
+                    <a:pt x="4082483" y="3011800"/>
+                  </a:lnTo>
+                  <a:lnTo>
+                    <a:pt x="4010861" y="2982311"/>
+                  </a:lnTo>
+                  <a:lnTo>
+                    <a:pt x="3939238" y="2950980"/>
+                  </a:lnTo>
+                  <a:lnTo>
+                    <a:pt x="3867616" y="2917690"/>
+                  </a:lnTo>
+                  <a:lnTo>
+                    <a:pt x="3795993" y="2882321"/>
+                  </a:lnTo>
+                  <a:lnTo>
+                    <a:pt x="3724371" y="2844742"/>
+                  </a:lnTo>
+                  <a:lnTo>
+                    <a:pt x="3652748" y="2804814"/>
+                  </a:lnTo>
+                  <a:lnTo>
+                    <a:pt x="3581126" y="2762392"/>
+                  </a:lnTo>
+                  <a:lnTo>
+                    <a:pt x="3509503" y="2717319"/>
+                  </a:lnTo>
+                  <a:lnTo>
+                    <a:pt x="3437881" y="2669430"/>
+                  </a:lnTo>
+                  <a:lnTo>
+                    <a:pt x="3366258" y="2652065"/>
+                  </a:lnTo>
+                  <a:lnTo>
+                    <a:pt x="3294636" y="2648867"/>
+                  </a:lnTo>
+                  <a:lnTo>
+                    <a:pt x="3223013" y="2645658"/>
+                  </a:lnTo>
+                  <a:lnTo>
+                    <a:pt x="3151391" y="2642436"/>
+                  </a:lnTo>
+                  <a:lnTo>
+                    <a:pt x="3079768" y="2639201"/>
+                  </a:lnTo>
+                  <a:lnTo>
+                    <a:pt x="3008146" y="2635954"/>
+                  </a:lnTo>
+                  <a:lnTo>
+                    <a:pt x="2936523" y="2632695"/>
+                  </a:lnTo>
+                  <a:lnTo>
+                    <a:pt x="2864901" y="2629423"/>
+                  </a:lnTo>
+                  <a:lnTo>
+                    <a:pt x="2793278" y="2626138"/>
+                  </a:lnTo>
+                  <a:lnTo>
+                    <a:pt x="2721655" y="2622841"/>
+                  </a:lnTo>
+                  <a:lnTo>
+                    <a:pt x="2650033" y="2619531"/>
+                  </a:lnTo>
+                  <a:lnTo>
+                    <a:pt x="2578410" y="2616209"/>
+                  </a:lnTo>
+                  <a:lnTo>
+                    <a:pt x="2506788" y="2612873"/>
+                  </a:lnTo>
+                  <a:lnTo>
+                    <a:pt x="2435165" y="2609525"/>
+                  </a:lnTo>
+                  <a:lnTo>
+                    <a:pt x="2363543" y="2606164"/>
+                  </a:lnTo>
+                  <a:lnTo>
+                    <a:pt x="2291920" y="2602790"/>
+                  </a:lnTo>
+                  <a:lnTo>
+                    <a:pt x="2220298" y="2599403"/>
+                  </a:lnTo>
+                  <a:lnTo>
+                    <a:pt x="2148675" y="2596004"/>
+                  </a:lnTo>
+                  <a:lnTo>
+                    <a:pt x="2077053" y="2592591"/>
+                  </a:lnTo>
+                  <a:lnTo>
+                    <a:pt x="2005430" y="2589164"/>
+                  </a:lnTo>
+                  <a:lnTo>
+                    <a:pt x="1933808" y="2585725"/>
+                  </a:lnTo>
+                  <a:lnTo>
+                    <a:pt x="1862185" y="2582273"/>
+                  </a:lnTo>
+                  <a:lnTo>
+                    <a:pt x="1790563" y="2578807"/>
+                  </a:lnTo>
+                  <a:lnTo>
+                    <a:pt x="1718940" y="2575328"/>
+                  </a:lnTo>
+                  <a:lnTo>
+                    <a:pt x="1647318" y="2571835"/>
+                  </a:lnTo>
+                  <a:lnTo>
+                    <a:pt x="1575695" y="2568329"/>
+                  </a:lnTo>
+                  <a:lnTo>
+                    <a:pt x="1504073" y="2564810"/>
+                  </a:lnTo>
+                  <a:lnTo>
+                    <a:pt x="1432450" y="2561277"/>
+                  </a:lnTo>
+                  <a:lnTo>
+                    <a:pt x="1360827" y="2557730"/>
+                  </a:lnTo>
+                  <a:lnTo>
+                    <a:pt x="1289205" y="2554170"/>
+                  </a:lnTo>
+                  <a:lnTo>
+                    <a:pt x="1217582" y="2550597"/>
+                  </a:lnTo>
+                  <a:lnTo>
+                    <a:pt x="1145960" y="2547009"/>
+                  </a:lnTo>
+                  <a:lnTo>
+                    <a:pt x="1074337" y="2543408"/>
+                  </a:lnTo>
+                  <a:lnTo>
+                    <a:pt x="1002715" y="2539792"/>
+                  </a:lnTo>
+                  <a:lnTo>
+                    <a:pt x="931092" y="2536163"/>
+                  </a:lnTo>
+                  <a:lnTo>
+                    <a:pt x="859470" y="2532520"/>
+                  </a:lnTo>
+                  <a:lnTo>
+                    <a:pt x="787847" y="2528863"/>
+                  </a:lnTo>
+                  <a:lnTo>
+                    <a:pt x="716225" y="2525192"/>
+                  </a:lnTo>
+                  <a:lnTo>
+                    <a:pt x="644602" y="2521507"/>
+                  </a:lnTo>
+                  <a:lnTo>
+                    <a:pt x="572980" y="2517807"/>
+                  </a:lnTo>
+                  <a:lnTo>
+                    <a:pt x="501357" y="2514094"/>
+                  </a:lnTo>
+                  <a:lnTo>
+                    <a:pt x="429735" y="2510366"/>
+                  </a:lnTo>
+                  <a:lnTo>
+                    <a:pt x="358112" y="2506624"/>
+                  </a:lnTo>
+                  <a:lnTo>
+                    <a:pt x="286490" y="2502867"/>
+                  </a:lnTo>
+                  <a:lnTo>
+                    <a:pt x="214867" y="2499096"/>
+                  </a:lnTo>
+                  <a:lnTo>
+                    <a:pt x="143245" y="2495310"/>
+                  </a:lnTo>
+                  <a:lnTo>
+                    <a:pt x="71622" y="2491510"/>
+                  </a:lnTo>
+                  <a:lnTo>
+                    <a:pt x="0" y="2487695"/>
                   </a:lnTo>
                   <a:close/>
                 </a:path>
@@ -3521,243 +3518,240 @@
           </p:nvSpPr>
           <p:spPr>
             <a:xfrm>
-              <a:off x="2890203" y="2073503"/>
-              <a:ext cx="5372475" cy="2801304"/>
+              <a:off x="2892339" y="2073503"/>
+              <a:ext cx="5370339" cy="2802506"/>
             </a:xfrm>
             <a:custGeom>
               <a:avLst/>
               <a:pathLst>
-                <a:path w="5372475" h="2801304">
+                <a:path w="5370339" h="2802506">
                   <a:moveTo>
                     <a:pt x="0" y="0"/>
                   </a:moveTo>
                   <a:lnTo>
-                    <a:pt x="786" y="2384"/>
-                  </a:lnTo>
-                  <a:lnTo>
-                    <a:pt x="72408" y="206872"/>
-                  </a:lnTo>
-                  <a:lnTo>
-                    <a:pt x="144031" y="399348"/>
-                  </a:lnTo>
-                  <a:lnTo>
-                    <a:pt x="215653" y="580519"/>
-                  </a:lnTo>
-                  <a:lnTo>
-                    <a:pt x="287276" y="751049"/>
-                  </a:lnTo>
-                  <a:lnTo>
-                    <a:pt x="358898" y="911562"/>
-                  </a:lnTo>
-                  <a:lnTo>
-                    <a:pt x="430521" y="1062646"/>
-                  </a:lnTo>
-                  <a:lnTo>
-                    <a:pt x="502143" y="1204857"/>
-                  </a:lnTo>
-                  <a:lnTo>
-                    <a:pt x="573766" y="1338714"/>
-                  </a:lnTo>
-                  <a:lnTo>
-                    <a:pt x="645388" y="1464708"/>
-                  </a:lnTo>
-                  <a:lnTo>
-                    <a:pt x="717011" y="1583302"/>
-                  </a:lnTo>
-                  <a:lnTo>
-                    <a:pt x="788633" y="1694930"/>
-                  </a:lnTo>
-                  <a:lnTo>
-                    <a:pt x="860256" y="1800002"/>
-                  </a:lnTo>
-                  <a:lnTo>
-                    <a:pt x="931878" y="1898901"/>
-                  </a:lnTo>
-                  <a:lnTo>
-                    <a:pt x="1003501" y="1991992"/>
-                  </a:lnTo>
-                  <a:lnTo>
-                    <a:pt x="1075123" y="2079614"/>
-                  </a:lnTo>
-                  <a:lnTo>
-                    <a:pt x="1146746" y="2162090"/>
-                  </a:lnTo>
-                  <a:lnTo>
-                    <a:pt x="1218369" y="2239721"/>
-                  </a:lnTo>
-                  <a:lnTo>
-                    <a:pt x="1289991" y="2312793"/>
-                  </a:lnTo>
-                  <a:lnTo>
-                    <a:pt x="1361614" y="2381572"/>
-                  </a:lnTo>
-                  <a:lnTo>
-                    <a:pt x="1433236" y="2446311"/>
-                  </a:lnTo>
-                  <a:lnTo>
-                    <a:pt x="1504859" y="2507248"/>
-                  </a:lnTo>
-                  <a:lnTo>
-                    <a:pt x="1576481" y="2564606"/>
-                  </a:lnTo>
-                  <a:lnTo>
-                    <a:pt x="1648104" y="2618594"/>
-                  </a:lnTo>
-                  <a:lnTo>
-                    <a:pt x="1719726" y="2655241"/>
-                  </a:lnTo>
-                  <a:lnTo>
-                    <a:pt x="1791349" y="2658386"/>
-                  </a:lnTo>
-                  <a:lnTo>
-                    <a:pt x="1862971" y="2661519"/>
-                  </a:lnTo>
-                  <a:lnTo>
-                    <a:pt x="1934594" y="2664640"/>
-                  </a:lnTo>
-                  <a:lnTo>
-                    <a:pt x="2006216" y="2667749"/>
-                  </a:lnTo>
-                  <a:lnTo>
-                    <a:pt x="2077839" y="2670846"/>
-                  </a:lnTo>
-                  <a:lnTo>
-                    <a:pt x="2149461" y="2673931"/>
-                  </a:lnTo>
-                  <a:lnTo>
-                    <a:pt x="2221084" y="2677005"/>
-                  </a:lnTo>
-                  <a:lnTo>
-                    <a:pt x="2292706" y="2680067"/>
-                  </a:lnTo>
-                  <a:lnTo>
-                    <a:pt x="2364329" y="2683118"/>
-                  </a:lnTo>
-                  <a:lnTo>
-                    <a:pt x="2435951" y="2686157"/>
-                  </a:lnTo>
-                  <a:lnTo>
-                    <a:pt x="2507574" y="2689184"/>
-                  </a:lnTo>
-                  <a:lnTo>
-                    <a:pt x="2579197" y="2692200"/>
-                  </a:lnTo>
-                  <a:lnTo>
-                    <a:pt x="2650819" y="2695204"/>
-                  </a:lnTo>
-                  <a:lnTo>
-                    <a:pt x="2722442" y="2698197"/>
-                  </a:lnTo>
-                  <a:lnTo>
-                    <a:pt x="2794064" y="2701179"/>
-                  </a:lnTo>
-                  <a:lnTo>
-                    <a:pt x="2865687" y="2704149"/>
-                  </a:lnTo>
-                  <a:lnTo>
-                    <a:pt x="2937309" y="2707108"/>
-                  </a:lnTo>
-                  <a:lnTo>
-                    <a:pt x="3008932" y="2710056"/>
-                  </a:lnTo>
-                  <a:lnTo>
-                    <a:pt x="3080554" y="2712993"/>
-                  </a:lnTo>
-                  <a:lnTo>
-                    <a:pt x="3152177" y="2715918"/>
-                  </a:lnTo>
-                  <a:lnTo>
-                    <a:pt x="3223799" y="2718833"/>
-                  </a:lnTo>
-                  <a:lnTo>
-                    <a:pt x="3295422" y="2721736"/>
-                  </a:lnTo>
-                  <a:lnTo>
-                    <a:pt x="3367044" y="2724628"/>
-                  </a:lnTo>
-                  <a:lnTo>
-                    <a:pt x="3438667" y="2727510"/>
-                  </a:lnTo>
-                  <a:lnTo>
-                    <a:pt x="3510289" y="2730380"/>
-                  </a:lnTo>
-                  <a:lnTo>
-                    <a:pt x="3581912" y="2733239"/>
-                  </a:lnTo>
-                  <a:lnTo>
-                    <a:pt x="3653534" y="2736088"/>
-                  </a:lnTo>
-                  <a:lnTo>
-                    <a:pt x="3725157" y="2738926"/>
-                  </a:lnTo>
-                  <a:lnTo>
-                    <a:pt x="3796779" y="2741753"/>
-                  </a:lnTo>
-                  <a:lnTo>
-                    <a:pt x="3868402" y="2744569"/>
-                  </a:lnTo>
-                  <a:lnTo>
-                    <a:pt x="3940024" y="2747375"/>
-                  </a:lnTo>
-                  <a:lnTo>
-                    <a:pt x="4011647" y="2750170"/>
-                  </a:lnTo>
-                  <a:lnTo>
-                    <a:pt x="4083270" y="2752954"/>
-                  </a:lnTo>
-                  <a:lnTo>
-                    <a:pt x="4154892" y="2755728"/>
-                  </a:lnTo>
-                  <a:lnTo>
-                    <a:pt x="4226515" y="2758491"/>
-                  </a:lnTo>
-                  <a:lnTo>
-                    <a:pt x="4298137" y="2761244"/>
-                  </a:lnTo>
-                  <a:lnTo>
-                    <a:pt x="4369760" y="2763987"/>
-                  </a:lnTo>
-                  <a:lnTo>
-                    <a:pt x="4441382" y="2766718"/>
-                  </a:lnTo>
-                  <a:lnTo>
-                    <a:pt x="4513005" y="2769440"/>
-                  </a:lnTo>
-                  <a:lnTo>
-                    <a:pt x="4584627" y="2772151"/>
-                  </a:lnTo>
-                  <a:lnTo>
-                    <a:pt x="4656250" y="2774852"/>
-                  </a:lnTo>
-                  <a:lnTo>
-                    <a:pt x="4727872" y="2777543"/>
-                  </a:lnTo>
-                  <a:lnTo>
-                    <a:pt x="4799495" y="2780223"/>
-                  </a:lnTo>
-                  <a:lnTo>
-                    <a:pt x="4871117" y="2782894"/>
-                  </a:lnTo>
-                  <a:lnTo>
-                    <a:pt x="4942740" y="2785554"/>
-                  </a:lnTo>
-                  <a:lnTo>
-                    <a:pt x="5014362" y="2788204"/>
-                  </a:lnTo>
-                  <a:lnTo>
-                    <a:pt x="5085985" y="2790844"/>
-                  </a:lnTo>
-                  <a:lnTo>
-                    <a:pt x="5157607" y="2793474"/>
-                  </a:lnTo>
-                  <a:lnTo>
-                    <a:pt x="5229230" y="2796094"/>
-                  </a:lnTo>
-                  <a:lnTo>
-                    <a:pt x="5300852" y="2798704"/>
-                  </a:lnTo>
-                  <a:lnTo>
-                    <a:pt x="5372475" y="2801304"/>
+                    <a:pt x="70272" y="201238"/>
+                  </a:lnTo>
+                  <a:lnTo>
+                    <a:pt x="141895" y="394279"/>
+                  </a:lnTo>
+                  <a:lnTo>
+                    <a:pt x="213517" y="575968"/>
+                  </a:lnTo>
+                  <a:lnTo>
+                    <a:pt x="285140" y="746972"/>
+                  </a:lnTo>
+                  <a:lnTo>
+                    <a:pt x="356763" y="907919"/>
+                  </a:lnTo>
+                  <a:lnTo>
+                    <a:pt x="428385" y="1059401"/>
+                  </a:lnTo>
+                  <a:lnTo>
+                    <a:pt x="500008" y="1201975"/>
+                  </a:lnTo>
+                  <a:lnTo>
+                    <a:pt x="571630" y="1336164"/>
+                  </a:lnTo>
+                  <a:lnTo>
+                    <a:pt x="643253" y="1462461"/>
+                  </a:lnTo>
+                  <a:lnTo>
+                    <a:pt x="714875" y="1581331"/>
+                  </a:lnTo>
+                  <a:lnTo>
+                    <a:pt x="786498" y="1693211"/>
+                  </a:lnTo>
+                  <a:lnTo>
+                    <a:pt x="858120" y="1798511"/>
+                  </a:lnTo>
+                  <a:lnTo>
+                    <a:pt x="929743" y="1897618"/>
+                  </a:lnTo>
+                  <a:lnTo>
+                    <a:pt x="1001365" y="1990897"/>
+                  </a:lnTo>
+                  <a:lnTo>
+                    <a:pt x="1072988" y="2078690"/>
+                  </a:lnTo>
+                  <a:lnTo>
+                    <a:pt x="1144610" y="2161320"/>
+                  </a:lnTo>
+                  <a:lnTo>
+                    <a:pt x="1216233" y="2239091"/>
+                  </a:lnTo>
+                  <a:lnTo>
+                    <a:pt x="1287855" y="2312288"/>
+                  </a:lnTo>
+                  <a:lnTo>
+                    <a:pt x="1359478" y="2381180"/>
+                  </a:lnTo>
+                  <a:lnTo>
+                    <a:pt x="1431100" y="2446021"/>
+                  </a:lnTo>
+                  <a:lnTo>
+                    <a:pt x="1502723" y="2507049"/>
+                  </a:lnTo>
+                  <a:lnTo>
+                    <a:pt x="1574345" y="2564488"/>
+                  </a:lnTo>
+                  <a:lnTo>
+                    <a:pt x="1645968" y="2618548"/>
+                  </a:lnTo>
+                  <a:lnTo>
+                    <a:pt x="1717591" y="2655250"/>
+                  </a:lnTo>
+                  <a:lnTo>
+                    <a:pt x="1789213" y="2658423"/>
+                  </a:lnTo>
+                  <a:lnTo>
+                    <a:pt x="1860836" y="2661584"/>
+                  </a:lnTo>
+                  <a:lnTo>
+                    <a:pt x="1932458" y="2664733"/>
+                  </a:lnTo>
+                  <a:lnTo>
+                    <a:pt x="2004081" y="2667869"/>
+                  </a:lnTo>
+                  <a:lnTo>
+                    <a:pt x="2075703" y="2670994"/>
+                  </a:lnTo>
+                  <a:lnTo>
+                    <a:pt x="2147326" y="2674107"/>
+                  </a:lnTo>
+                  <a:lnTo>
+                    <a:pt x="2218948" y="2677208"/>
+                  </a:lnTo>
+                  <a:lnTo>
+                    <a:pt x="2290571" y="2680297"/>
+                  </a:lnTo>
+                  <a:lnTo>
+                    <a:pt x="2362193" y="2683374"/>
+                  </a:lnTo>
+                  <a:lnTo>
+                    <a:pt x="2433816" y="2686439"/>
+                  </a:lnTo>
+                  <a:lnTo>
+                    <a:pt x="2505438" y="2689493"/>
+                  </a:lnTo>
+                  <a:lnTo>
+                    <a:pt x="2577061" y="2692535"/>
+                  </a:lnTo>
+                  <a:lnTo>
+                    <a:pt x="2648683" y="2695565"/>
+                  </a:lnTo>
+                  <a:lnTo>
+                    <a:pt x="2720306" y="2698583"/>
+                  </a:lnTo>
+                  <a:lnTo>
+                    <a:pt x="2791928" y="2701590"/>
+                  </a:lnTo>
+                  <a:lnTo>
+                    <a:pt x="2863551" y="2704586"/>
+                  </a:lnTo>
+                  <a:lnTo>
+                    <a:pt x="2935173" y="2707570"/>
+                  </a:lnTo>
+                  <a:lnTo>
+                    <a:pt x="3006796" y="2710543"/>
+                  </a:lnTo>
+                  <a:lnTo>
+                    <a:pt x="3078419" y="2713504"/>
+                  </a:lnTo>
+                  <a:lnTo>
+                    <a:pt x="3150041" y="2716454"/>
+                  </a:lnTo>
+                  <a:lnTo>
+                    <a:pt x="3221664" y="2719392"/>
+                  </a:lnTo>
+                  <a:lnTo>
+                    <a:pt x="3293286" y="2722320"/>
+                  </a:lnTo>
+                  <a:lnTo>
+                    <a:pt x="3364909" y="2725236"/>
+                  </a:lnTo>
+                  <a:lnTo>
+                    <a:pt x="3436531" y="2728141"/>
+                  </a:lnTo>
+                  <a:lnTo>
+                    <a:pt x="3508154" y="2731035"/>
+                  </a:lnTo>
+                  <a:lnTo>
+                    <a:pt x="3579776" y="2733918"/>
+                  </a:lnTo>
+                  <a:lnTo>
+                    <a:pt x="3651399" y="2736789"/>
+                  </a:lnTo>
+                  <a:lnTo>
+                    <a:pt x="3723021" y="2739650"/>
+                  </a:lnTo>
+                  <a:lnTo>
+                    <a:pt x="3794644" y="2742500"/>
+                  </a:lnTo>
+                  <a:lnTo>
+                    <a:pt x="3866266" y="2745339"/>
+                  </a:lnTo>
+                  <a:lnTo>
+                    <a:pt x="3937889" y="2748167"/>
+                  </a:lnTo>
+                  <a:lnTo>
+                    <a:pt x="4009511" y="2750984"/>
+                  </a:lnTo>
+                  <a:lnTo>
+                    <a:pt x="4081134" y="2753790"/>
+                  </a:lnTo>
+                  <a:lnTo>
+                    <a:pt x="4152756" y="2756586"/>
+                  </a:lnTo>
+                  <a:lnTo>
+                    <a:pt x="4224379" y="2759371"/>
+                  </a:lnTo>
+                  <a:lnTo>
+                    <a:pt x="4296001" y="2762145"/>
+                  </a:lnTo>
+                  <a:lnTo>
+                    <a:pt x="4367624" y="2764909"/>
+                  </a:lnTo>
+                  <a:lnTo>
+                    <a:pt x="4439246" y="2767662"/>
+                  </a:lnTo>
+                  <a:lnTo>
+                    <a:pt x="4510869" y="2770404"/>
+                  </a:lnTo>
+                  <a:lnTo>
+                    <a:pt x="4582492" y="2773136"/>
+                  </a:lnTo>
+                  <a:lnTo>
+                    <a:pt x="4654114" y="2775858"/>
+                  </a:lnTo>
+                  <a:lnTo>
+                    <a:pt x="4725737" y="2778569"/>
+                  </a:lnTo>
+                  <a:lnTo>
+                    <a:pt x="4797359" y="2781270"/>
+                  </a:lnTo>
+                  <a:lnTo>
+                    <a:pt x="4868982" y="2783960"/>
+                  </a:lnTo>
+                  <a:lnTo>
+                    <a:pt x="4940604" y="2786640"/>
+                  </a:lnTo>
+                  <a:lnTo>
+                    <a:pt x="5012227" y="2789310"/>
+                  </a:lnTo>
+                  <a:lnTo>
+                    <a:pt x="5083849" y="2791970"/>
+                  </a:lnTo>
+                  <a:lnTo>
+                    <a:pt x="5155472" y="2794619"/>
+                  </a:lnTo>
+                  <a:lnTo>
+                    <a:pt x="5227094" y="2797258"/>
+                  </a:lnTo>
+                  <a:lnTo>
+                    <a:pt x="5298717" y="2799887"/>
+                  </a:lnTo>
+                  <a:lnTo>
+                    <a:pt x="5370339" y="2802506"/>
                   </a:lnTo>
                 </a:path>
               </a:pathLst>
@@ -3777,309 +3771,309 @@
           </p:nvSpPr>
           <p:spPr>
             <a:xfrm>
-              <a:off x="1172049" y="4562830"/>
-              <a:ext cx="7090630" cy="957262"/>
+              <a:off x="1172049" y="4561198"/>
+              <a:ext cx="7090630" cy="959037"/>
             </a:xfrm>
             <a:custGeom>
               <a:avLst/>
               <a:pathLst>
-                <a:path w="7090630" h="957262">
+                <a:path w="7090630" h="959037">
                   <a:moveTo>
-                    <a:pt x="7090630" y="957262"/>
+                    <a:pt x="7090630" y="959037"/>
                   </a:moveTo>
                   <a:lnTo>
-                    <a:pt x="7019007" y="954943"/>
-                  </a:lnTo>
-                  <a:lnTo>
-                    <a:pt x="6947385" y="952480"/>
-                  </a:lnTo>
-                  <a:lnTo>
-                    <a:pt x="6875762" y="949863"/>
-                  </a:lnTo>
-                  <a:lnTo>
-                    <a:pt x="6804139" y="947082"/>
-                  </a:lnTo>
-                  <a:lnTo>
-                    <a:pt x="6732517" y="944128"/>
-                  </a:lnTo>
-                  <a:lnTo>
-                    <a:pt x="6660894" y="940990"/>
-                  </a:lnTo>
-                  <a:lnTo>
-                    <a:pt x="6589272" y="937656"/>
-                  </a:lnTo>
-                  <a:lnTo>
-                    <a:pt x="6517649" y="934113"/>
-                  </a:lnTo>
-                  <a:lnTo>
-                    <a:pt x="6446027" y="930350"/>
-                  </a:lnTo>
-                  <a:lnTo>
-                    <a:pt x="6374404" y="926352"/>
-                  </a:lnTo>
-                  <a:lnTo>
-                    <a:pt x="6302782" y="922104"/>
-                  </a:lnTo>
-                  <a:lnTo>
-                    <a:pt x="6231159" y="917592"/>
-                  </a:lnTo>
-                  <a:lnTo>
-                    <a:pt x="6159537" y="912797"/>
-                  </a:lnTo>
-                  <a:lnTo>
-                    <a:pt x="6087914" y="907704"/>
-                  </a:lnTo>
-                  <a:lnTo>
-                    <a:pt x="6016292" y="902293"/>
-                  </a:lnTo>
-                  <a:lnTo>
-                    <a:pt x="5944669" y="896544"/>
-                  </a:lnTo>
-                  <a:lnTo>
-                    <a:pt x="5873047" y="890436"/>
-                  </a:lnTo>
-                  <a:lnTo>
-                    <a:pt x="5801424" y="883947"/>
-                  </a:lnTo>
-                  <a:lnTo>
-                    <a:pt x="5729802" y="877053"/>
-                  </a:lnTo>
-                  <a:lnTo>
-                    <a:pt x="5658179" y="869729"/>
-                  </a:lnTo>
-                  <a:lnTo>
-                    <a:pt x="5586557" y="861948"/>
-                  </a:lnTo>
-                  <a:lnTo>
-                    <a:pt x="5514934" y="853681"/>
-                  </a:lnTo>
-                  <a:lnTo>
-                    <a:pt x="5443311" y="844899"/>
-                  </a:lnTo>
-                  <a:lnTo>
-                    <a:pt x="5371689" y="835568"/>
-                  </a:lnTo>
-                  <a:lnTo>
-                    <a:pt x="5300066" y="825656"/>
-                  </a:lnTo>
-                  <a:lnTo>
-                    <a:pt x="5228444" y="815124"/>
-                  </a:lnTo>
-                  <a:lnTo>
-                    <a:pt x="5156821" y="803936"/>
-                  </a:lnTo>
-                  <a:lnTo>
-                    <a:pt x="5085199" y="792049"/>
-                  </a:lnTo>
-                  <a:lnTo>
-                    <a:pt x="5013576" y="779420"/>
-                  </a:lnTo>
-                  <a:lnTo>
-                    <a:pt x="4941954" y="766004"/>
-                  </a:lnTo>
-                  <a:lnTo>
-                    <a:pt x="4870331" y="751750"/>
-                  </a:lnTo>
-                  <a:lnTo>
-                    <a:pt x="4798709" y="736606"/>
-                  </a:lnTo>
-                  <a:lnTo>
-                    <a:pt x="4727086" y="720518"/>
-                  </a:lnTo>
-                  <a:lnTo>
-                    <a:pt x="4655464" y="703426"/>
-                  </a:lnTo>
-                  <a:lnTo>
-                    <a:pt x="4583841" y="685267"/>
-                  </a:lnTo>
-                  <a:lnTo>
-                    <a:pt x="4512219" y="665975"/>
-                  </a:lnTo>
-                  <a:lnTo>
-                    <a:pt x="4440596" y="645479"/>
-                  </a:lnTo>
-                  <a:lnTo>
-                    <a:pt x="4368974" y="623704"/>
-                  </a:lnTo>
-                  <a:lnTo>
-                    <a:pt x="4297351" y="600570"/>
-                  </a:lnTo>
-                  <a:lnTo>
-                    <a:pt x="4225729" y="575992"/>
-                  </a:lnTo>
-                  <a:lnTo>
-                    <a:pt x="4154106" y="549881"/>
-                  </a:lnTo>
-                  <a:lnTo>
-                    <a:pt x="4082483" y="522140"/>
-                  </a:lnTo>
-                  <a:lnTo>
-                    <a:pt x="4010861" y="492668"/>
-                  </a:lnTo>
-                  <a:lnTo>
-                    <a:pt x="3939238" y="461358"/>
-                  </a:lnTo>
-                  <a:lnTo>
-                    <a:pt x="3867616" y="428093"/>
-                  </a:lnTo>
-                  <a:lnTo>
-                    <a:pt x="3795993" y="392752"/>
-                  </a:lnTo>
-                  <a:lnTo>
-                    <a:pt x="3724371" y="355206"/>
-                  </a:lnTo>
-                  <a:lnTo>
-                    <a:pt x="3652748" y="315317"/>
-                  </a:lnTo>
-                  <a:lnTo>
-                    <a:pt x="3581126" y="272939"/>
-                  </a:lnTo>
-                  <a:lnTo>
-                    <a:pt x="3509503" y="227916"/>
-                  </a:lnTo>
-                  <a:lnTo>
-                    <a:pt x="3437881" y="180084"/>
-                  </a:lnTo>
-                  <a:lnTo>
-                    <a:pt x="3366258" y="162757"/>
-                  </a:lnTo>
-                  <a:lnTo>
-                    <a:pt x="3294636" y="159589"/>
-                  </a:lnTo>
-                  <a:lnTo>
-                    <a:pt x="3223013" y="156408"/>
-                  </a:lnTo>
-                  <a:lnTo>
-                    <a:pt x="3151391" y="153215"/>
-                  </a:lnTo>
-                  <a:lnTo>
-                    <a:pt x="3079768" y="150010"/>
-                  </a:lnTo>
-                  <a:lnTo>
-                    <a:pt x="3008146" y="146793"/>
-                  </a:lnTo>
-                  <a:lnTo>
-                    <a:pt x="2936523" y="143563"/>
-                  </a:lnTo>
-                  <a:lnTo>
-                    <a:pt x="2864901" y="140321"/>
-                  </a:lnTo>
-                  <a:lnTo>
-                    <a:pt x="2793278" y="137067"/>
-                  </a:lnTo>
-                  <a:lnTo>
-                    <a:pt x="2721655" y="133801"/>
-                  </a:lnTo>
-                  <a:lnTo>
-                    <a:pt x="2650033" y="130522"/>
-                  </a:lnTo>
-                  <a:lnTo>
-                    <a:pt x="2578410" y="127230"/>
-                  </a:lnTo>
-                  <a:lnTo>
-                    <a:pt x="2506788" y="123926"/>
-                  </a:lnTo>
-                  <a:lnTo>
-                    <a:pt x="2435165" y="120609"/>
-                  </a:lnTo>
-                  <a:lnTo>
-                    <a:pt x="2363543" y="117280"/>
-                  </a:lnTo>
-                  <a:lnTo>
-                    <a:pt x="2291920" y="113938"/>
-                  </a:lnTo>
-                  <a:lnTo>
-                    <a:pt x="2220298" y="110583"/>
-                  </a:lnTo>
-                  <a:lnTo>
-                    <a:pt x="2148675" y="107216"/>
-                  </a:lnTo>
-                  <a:lnTo>
-                    <a:pt x="2077053" y="103836"/>
-                  </a:lnTo>
-                  <a:lnTo>
-                    <a:pt x="2005430" y="100442"/>
-                  </a:lnTo>
-                  <a:lnTo>
-                    <a:pt x="1933808" y="97036"/>
-                  </a:lnTo>
-                  <a:lnTo>
-                    <a:pt x="1862185" y="93617"/>
-                  </a:lnTo>
-                  <a:lnTo>
-                    <a:pt x="1790563" y="90185"/>
-                  </a:lnTo>
-                  <a:lnTo>
-                    <a:pt x="1718940" y="86740"/>
-                  </a:lnTo>
-                  <a:lnTo>
-                    <a:pt x="1647318" y="83282"/>
-                  </a:lnTo>
-                  <a:lnTo>
-                    <a:pt x="1575695" y="79810"/>
-                  </a:lnTo>
-                  <a:lnTo>
-                    <a:pt x="1504073" y="76325"/>
-                  </a:lnTo>
-                  <a:lnTo>
-                    <a:pt x="1432450" y="72827"/>
-                  </a:lnTo>
-                  <a:lnTo>
-                    <a:pt x="1360827" y="69316"/>
-                  </a:lnTo>
-                  <a:lnTo>
-                    <a:pt x="1289205" y="65791"/>
-                  </a:lnTo>
-                  <a:lnTo>
-                    <a:pt x="1217582" y="62253"/>
-                  </a:lnTo>
-                  <a:lnTo>
-                    <a:pt x="1145960" y="58701"/>
-                  </a:lnTo>
-                  <a:lnTo>
-                    <a:pt x="1074337" y="55136"/>
-                  </a:lnTo>
-                  <a:lnTo>
-                    <a:pt x="1002715" y="51558"/>
-                  </a:lnTo>
-                  <a:lnTo>
-                    <a:pt x="931092" y="47965"/>
-                  </a:lnTo>
-                  <a:lnTo>
-                    <a:pt x="859470" y="44359"/>
-                  </a:lnTo>
-                  <a:lnTo>
-                    <a:pt x="787847" y="40739"/>
-                  </a:lnTo>
-                  <a:lnTo>
-                    <a:pt x="716225" y="37106"/>
-                  </a:lnTo>
-                  <a:lnTo>
-                    <a:pt x="644602" y="33458"/>
-                  </a:lnTo>
-                  <a:lnTo>
-                    <a:pt x="572980" y="29797"/>
-                  </a:lnTo>
-                  <a:lnTo>
-                    <a:pt x="501357" y="26122"/>
-                  </a:lnTo>
-                  <a:lnTo>
-                    <a:pt x="429735" y="22432"/>
-                  </a:lnTo>
-                  <a:lnTo>
-                    <a:pt x="358112" y="18729"/>
-                  </a:lnTo>
-                  <a:lnTo>
-                    <a:pt x="286490" y="15012"/>
-                  </a:lnTo>
-                  <a:lnTo>
-                    <a:pt x="214867" y="11280"/>
-                  </a:lnTo>
-                  <a:lnTo>
-                    <a:pt x="143245" y="7534"/>
-                  </a:lnTo>
-                  <a:lnTo>
-                    <a:pt x="71622" y="3774"/>
+                    <a:pt x="7019007" y="956725"/>
+                  </a:lnTo>
+                  <a:lnTo>
+                    <a:pt x="6947385" y="954267"/>
+                  </a:lnTo>
+                  <a:lnTo>
+                    <a:pt x="6875762" y="951657"/>
+                  </a:lnTo>
+                  <a:lnTo>
+                    <a:pt x="6804139" y="948883"/>
+                  </a:lnTo>
+                  <a:lnTo>
+                    <a:pt x="6732517" y="945935"/>
+                  </a:lnTo>
+                  <a:lnTo>
+                    <a:pt x="6660894" y="942804"/>
+                  </a:lnTo>
+                  <a:lnTo>
+                    <a:pt x="6589272" y="939477"/>
+                  </a:lnTo>
+                  <a:lnTo>
+                    <a:pt x="6517649" y="935942"/>
+                  </a:lnTo>
+                  <a:lnTo>
+                    <a:pt x="6446027" y="932186"/>
+                  </a:lnTo>
+                  <a:lnTo>
+                    <a:pt x="6374404" y="928196"/>
+                  </a:lnTo>
+                  <a:lnTo>
+                    <a:pt x="6302782" y="923956"/>
+                  </a:lnTo>
+                  <a:lnTo>
+                    <a:pt x="6231159" y="919451"/>
+                  </a:lnTo>
+                  <a:lnTo>
+                    <a:pt x="6159537" y="914665"/>
+                  </a:lnTo>
+                  <a:lnTo>
+                    <a:pt x="6087914" y="909580"/>
+                  </a:lnTo>
+                  <a:lnTo>
+                    <a:pt x="6016292" y="904177"/>
+                  </a:lnTo>
+                  <a:lnTo>
+                    <a:pt x="5944669" y="898436"/>
+                  </a:lnTo>
+                  <a:lnTo>
+                    <a:pt x="5873047" y="892337"/>
+                  </a:lnTo>
+                  <a:lnTo>
+                    <a:pt x="5801424" y="885857"/>
+                  </a:lnTo>
+                  <a:lnTo>
+                    <a:pt x="5729802" y="878971"/>
+                  </a:lnTo>
+                  <a:lnTo>
+                    <a:pt x="5658179" y="871656"/>
+                  </a:lnTo>
+                  <a:lnTo>
+                    <a:pt x="5586557" y="863883"/>
+                  </a:lnTo>
+                  <a:lnTo>
+                    <a:pt x="5514934" y="855625"/>
+                  </a:lnTo>
+                  <a:lnTo>
+                    <a:pt x="5443311" y="846850"/>
+                  </a:lnTo>
+                  <a:lnTo>
+                    <a:pt x="5371689" y="837528"/>
+                  </a:lnTo>
+                  <a:lnTo>
+                    <a:pt x="5300066" y="827623"/>
+                  </a:lnTo>
+                  <a:lnTo>
+                    <a:pt x="5228444" y="817099"/>
+                  </a:lnTo>
+                  <a:lnTo>
+                    <a:pt x="5156821" y="805917"/>
+                  </a:lnTo>
+                  <a:lnTo>
+                    <a:pt x="5085199" y="794037"/>
+                  </a:lnTo>
+                  <a:lnTo>
+                    <a:pt x="5013576" y="781414"/>
+                  </a:lnTo>
+                  <a:lnTo>
+                    <a:pt x="4941954" y="768003"/>
+                  </a:lnTo>
+                  <a:lnTo>
+                    <a:pt x="4870331" y="753754"/>
+                  </a:lnTo>
+                  <a:lnTo>
+                    <a:pt x="4798709" y="738614"/>
+                  </a:lnTo>
+                  <a:lnTo>
+                    <a:pt x="4727086" y="722529"/>
+                  </a:lnTo>
+                  <a:lnTo>
+                    <a:pt x="4655464" y="705438"/>
+                  </a:lnTo>
+                  <a:lnTo>
+                    <a:pt x="4583841" y="687279"/>
+                  </a:lnTo>
+                  <a:lnTo>
+                    <a:pt x="4512219" y="667986"/>
+                  </a:lnTo>
+                  <a:lnTo>
+                    <a:pt x="4440596" y="647488"/>
+                  </a:lnTo>
+                  <a:lnTo>
+                    <a:pt x="4368974" y="625708"/>
+                  </a:lnTo>
+                  <a:lnTo>
+                    <a:pt x="4297351" y="602568"/>
+                  </a:lnTo>
+                  <a:lnTo>
+                    <a:pt x="4225729" y="577981"/>
+                  </a:lnTo>
+                  <a:lnTo>
+                    <a:pt x="4154106" y="551859"/>
+                  </a:lnTo>
+                  <a:lnTo>
+                    <a:pt x="4082483" y="524104"/>
+                  </a:lnTo>
+                  <a:lnTo>
+                    <a:pt x="4010861" y="494615"/>
+                  </a:lnTo>
+                  <a:lnTo>
+                    <a:pt x="3939238" y="463284"/>
+                  </a:lnTo>
+                  <a:lnTo>
+                    <a:pt x="3867616" y="429994"/>
+                  </a:lnTo>
+                  <a:lnTo>
+                    <a:pt x="3795993" y="394625"/>
+                  </a:lnTo>
+                  <a:lnTo>
+                    <a:pt x="3724371" y="357046"/>
+                  </a:lnTo>
+                  <a:lnTo>
+                    <a:pt x="3652748" y="317118"/>
+                  </a:lnTo>
+                  <a:lnTo>
+                    <a:pt x="3581126" y="274696"/>
+                  </a:lnTo>
+                  <a:lnTo>
+                    <a:pt x="3509503" y="229623"/>
+                  </a:lnTo>
+                  <a:lnTo>
+                    <a:pt x="3437881" y="181734"/>
+                  </a:lnTo>
+                  <a:lnTo>
+                    <a:pt x="3366258" y="164369"/>
+                  </a:lnTo>
+                  <a:lnTo>
+                    <a:pt x="3294636" y="161171"/>
+                  </a:lnTo>
+                  <a:lnTo>
+                    <a:pt x="3223013" y="157962"/>
+                  </a:lnTo>
+                  <a:lnTo>
+                    <a:pt x="3151391" y="154740"/>
+                  </a:lnTo>
+                  <a:lnTo>
+                    <a:pt x="3079768" y="151505"/>
+                  </a:lnTo>
+                  <a:lnTo>
+                    <a:pt x="3008146" y="148258"/>
+                  </a:lnTo>
+                  <a:lnTo>
+                    <a:pt x="2936523" y="144999"/>
+                  </a:lnTo>
+                  <a:lnTo>
+                    <a:pt x="2864901" y="141727"/>
+                  </a:lnTo>
+                  <a:lnTo>
+                    <a:pt x="2793278" y="138442"/>
+                  </a:lnTo>
+                  <a:lnTo>
+                    <a:pt x="2721655" y="135145"/>
+                  </a:lnTo>
+                  <a:lnTo>
+                    <a:pt x="2650033" y="131835"/>
+                  </a:lnTo>
+                  <a:lnTo>
+                    <a:pt x="2578410" y="128513"/>
+                  </a:lnTo>
+                  <a:lnTo>
+                    <a:pt x="2506788" y="125178"/>
+                  </a:lnTo>
+                  <a:lnTo>
+                    <a:pt x="2435165" y="121829"/>
+                  </a:lnTo>
+                  <a:lnTo>
+                    <a:pt x="2363543" y="118468"/>
+                  </a:lnTo>
+                  <a:lnTo>
+                    <a:pt x="2291920" y="115094"/>
+                  </a:lnTo>
+                  <a:lnTo>
+                    <a:pt x="2220298" y="111708"/>
+                  </a:lnTo>
+                  <a:lnTo>
+                    <a:pt x="2148675" y="108308"/>
+                  </a:lnTo>
+                  <a:lnTo>
+                    <a:pt x="2077053" y="104895"/>
+                  </a:lnTo>
+                  <a:lnTo>
+                    <a:pt x="2005430" y="101468"/>
+                  </a:lnTo>
+                  <a:lnTo>
+                    <a:pt x="1933808" y="98029"/>
+                  </a:lnTo>
+                  <a:lnTo>
+                    <a:pt x="1862185" y="94577"/>
+                  </a:lnTo>
+                  <a:lnTo>
+                    <a:pt x="1790563" y="91111"/>
+                  </a:lnTo>
+                  <a:lnTo>
+                    <a:pt x="1718940" y="87632"/>
+                  </a:lnTo>
+                  <a:lnTo>
+                    <a:pt x="1647318" y="84139"/>
+                  </a:lnTo>
+                  <a:lnTo>
+                    <a:pt x="1575695" y="80633"/>
+                  </a:lnTo>
+                  <a:lnTo>
+                    <a:pt x="1504073" y="77114"/>
+                  </a:lnTo>
+                  <a:lnTo>
+                    <a:pt x="1432450" y="73581"/>
+                  </a:lnTo>
+                  <a:lnTo>
+                    <a:pt x="1360827" y="70035"/>
+                  </a:lnTo>
+                  <a:lnTo>
+                    <a:pt x="1289205" y="66474"/>
+                  </a:lnTo>
+                  <a:lnTo>
+                    <a:pt x="1217582" y="62901"/>
+                  </a:lnTo>
+                  <a:lnTo>
+                    <a:pt x="1145960" y="59313"/>
+                  </a:lnTo>
+                  <a:lnTo>
+                    <a:pt x="1074337" y="55712"/>
+                  </a:lnTo>
+                  <a:lnTo>
+                    <a:pt x="1002715" y="52096"/>
+                  </a:lnTo>
+                  <a:lnTo>
+                    <a:pt x="931092" y="48467"/>
+                  </a:lnTo>
+                  <a:lnTo>
+                    <a:pt x="859470" y="44824"/>
+                  </a:lnTo>
+                  <a:lnTo>
+                    <a:pt x="787847" y="41167"/>
+                  </a:lnTo>
+                  <a:lnTo>
+                    <a:pt x="716225" y="37496"/>
+                  </a:lnTo>
+                  <a:lnTo>
+                    <a:pt x="644602" y="33811"/>
+                  </a:lnTo>
+                  <a:lnTo>
+                    <a:pt x="572980" y="30111"/>
+                  </a:lnTo>
+                  <a:lnTo>
+                    <a:pt x="501357" y="26398"/>
+                  </a:lnTo>
+                  <a:lnTo>
+                    <a:pt x="429735" y="22670"/>
+                  </a:lnTo>
+                  <a:lnTo>
+                    <a:pt x="358112" y="18928"/>
+                  </a:lnTo>
+                  <a:lnTo>
+                    <a:pt x="286490" y="15171"/>
+                  </a:lnTo>
+                  <a:lnTo>
+                    <a:pt x="214867" y="11400"/>
+                  </a:lnTo>
+                  <a:lnTo>
+                    <a:pt x="143245" y="7614"/>
+                  </a:lnTo>
+                  <a:lnTo>
+                    <a:pt x="71622" y="3814"/>
                   </a:lnTo>
                   <a:lnTo>
                     <a:pt x="0" y="0"/>
@@ -4102,303 +4096,303 @@
           </p:nvSpPr>
           <p:spPr>
             <a:xfrm>
-              <a:off x="1393026" y="2073503"/>
-              <a:ext cx="6869652" cy="3324506"/>
+              <a:off x="1398550" y="2073503"/>
+              <a:ext cx="6864129" cy="3324955"/>
             </a:xfrm>
             <a:custGeom>
               <a:avLst/>
               <a:pathLst>
-                <a:path w="6869652" h="3324506">
+                <a:path w="6864129" h="3324955">
                   <a:moveTo>
                     <a:pt x="0" y="0"/>
                   </a:moveTo>
                   <a:lnTo>
-                    <a:pt x="65512" y="101147"/>
-                  </a:lnTo>
-                  <a:lnTo>
-                    <a:pt x="137135" y="208228"/>
-                  </a:lnTo>
-                  <a:lnTo>
-                    <a:pt x="208757" y="311919"/>
-                  </a:lnTo>
-                  <a:lnTo>
-                    <a:pt x="280380" y="412327"/>
-                  </a:lnTo>
-                  <a:lnTo>
-                    <a:pt x="352002" y="509557"/>
-                  </a:lnTo>
-                  <a:lnTo>
-                    <a:pt x="423625" y="603709"/>
-                  </a:lnTo>
-                  <a:lnTo>
-                    <a:pt x="495247" y="694881"/>
-                  </a:lnTo>
-                  <a:lnTo>
-                    <a:pt x="566870" y="783166"/>
-                  </a:lnTo>
-                  <a:lnTo>
-                    <a:pt x="638492" y="868656"/>
-                  </a:lnTo>
-                  <a:lnTo>
-                    <a:pt x="710115" y="951441"/>
-                  </a:lnTo>
-                  <a:lnTo>
-                    <a:pt x="781737" y="1031604"/>
-                  </a:lnTo>
-                  <a:lnTo>
-                    <a:pt x="853360" y="1109230"/>
-                  </a:lnTo>
-                  <a:lnTo>
-                    <a:pt x="924982" y="1184398"/>
-                  </a:lnTo>
-                  <a:lnTo>
-                    <a:pt x="996605" y="1257187"/>
-                  </a:lnTo>
-                  <a:lnTo>
-                    <a:pt x="1068227" y="1327672"/>
-                  </a:lnTo>
-                  <a:lnTo>
-                    <a:pt x="1139850" y="1395925"/>
-                  </a:lnTo>
-                  <a:lnTo>
-                    <a:pt x="1211472" y="1462018"/>
-                  </a:lnTo>
-                  <a:lnTo>
-                    <a:pt x="1283095" y="1526019"/>
-                  </a:lnTo>
-                  <a:lnTo>
-                    <a:pt x="1354717" y="1587993"/>
-                  </a:lnTo>
-                  <a:lnTo>
-                    <a:pt x="1426340" y="1648006"/>
-                  </a:lnTo>
-                  <a:lnTo>
-                    <a:pt x="1497963" y="1706119"/>
-                  </a:lnTo>
-                  <a:lnTo>
-                    <a:pt x="1569585" y="1762392"/>
-                  </a:lnTo>
-                  <a:lnTo>
-                    <a:pt x="1641208" y="1816884"/>
-                  </a:lnTo>
-                  <a:lnTo>
-                    <a:pt x="1712830" y="1869650"/>
-                  </a:lnTo>
-                  <a:lnTo>
-                    <a:pt x="1784453" y="1920747"/>
-                  </a:lnTo>
-                  <a:lnTo>
-                    <a:pt x="1856075" y="1970226"/>
-                  </a:lnTo>
-                  <a:lnTo>
-                    <a:pt x="1927698" y="2018138"/>
-                  </a:lnTo>
-                  <a:lnTo>
-                    <a:pt x="1999320" y="2064534"/>
-                  </a:lnTo>
-                  <a:lnTo>
-                    <a:pt x="2070943" y="2109461"/>
-                  </a:lnTo>
-                  <a:lnTo>
-                    <a:pt x="2142565" y="2152966"/>
-                  </a:lnTo>
-                  <a:lnTo>
-                    <a:pt x="2214188" y="2195093"/>
-                  </a:lnTo>
-                  <a:lnTo>
-                    <a:pt x="2285810" y="2235888"/>
-                  </a:lnTo>
-                  <a:lnTo>
-                    <a:pt x="2357433" y="2275390"/>
-                  </a:lnTo>
-                  <a:lnTo>
-                    <a:pt x="2429055" y="2313642"/>
-                  </a:lnTo>
-                  <a:lnTo>
-                    <a:pt x="2500678" y="2350684"/>
-                  </a:lnTo>
-                  <a:lnTo>
-                    <a:pt x="2572300" y="2386552"/>
-                  </a:lnTo>
-                  <a:lnTo>
-                    <a:pt x="2643923" y="2421285"/>
-                  </a:lnTo>
-                  <a:lnTo>
-                    <a:pt x="2715545" y="2454919"/>
-                  </a:lnTo>
-                  <a:lnTo>
-                    <a:pt x="2787168" y="2487488"/>
-                  </a:lnTo>
-                  <a:lnTo>
-                    <a:pt x="2858791" y="2519026"/>
-                  </a:lnTo>
-                  <a:lnTo>
-                    <a:pt x="2930413" y="2549565"/>
-                  </a:lnTo>
-                  <a:lnTo>
-                    <a:pt x="3002036" y="2579138"/>
-                  </a:lnTo>
-                  <a:lnTo>
-                    <a:pt x="3073658" y="2607775"/>
-                  </a:lnTo>
-                  <a:lnTo>
-                    <a:pt x="3145281" y="2635505"/>
-                  </a:lnTo>
-                  <a:lnTo>
-                    <a:pt x="3216903" y="2662357"/>
-                  </a:lnTo>
-                  <a:lnTo>
-                    <a:pt x="3288526" y="2688359"/>
-                  </a:lnTo>
-                  <a:lnTo>
-                    <a:pt x="3360148" y="2713538"/>
-                  </a:lnTo>
-                  <a:lnTo>
-                    <a:pt x="3431771" y="2737920"/>
-                  </a:lnTo>
-                  <a:lnTo>
-                    <a:pt x="3503393" y="2761530"/>
-                  </a:lnTo>
-                  <a:lnTo>
-                    <a:pt x="3575016" y="2784393"/>
-                  </a:lnTo>
-                  <a:lnTo>
-                    <a:pt x="3646638" y="2806532"/>
-                  </a:lnTo>
-                  <a:lnTo>
-                    <a:pt x="3718261" y="2827970"/>
-                  </a:lnTo>
-                  <a:lnTo>
-                    <a:pt x="3789883" y="2848730"/>
-                  </a:lnTo>
-                  <a:lnTo>
-                    <a:pt x="3861506" y="2868832"/>
-                  </a:lnTo>
-                  <a:lnTo>
-                    <a:pt x="3933128" y="2888298"/>
-                  </a:lnTo>
-                  <a:lnTo>
-                    <a:pt x="4004751" y="2907148"/>
-                  </a:lnTo>
-                  <a:lnTo>
-                    <a:pt x="4076373" y="2925401"/>
-                  </a:lnTo>
-                  <a:lnTo>
-                    <a:pt x="4147996" y="2943076"/>
-                  </a:lnTo>
-                  <a:lnTo>
-                    <a:pt x="4219619" y="2960191"/>
-                  </a:lnTo>
-                  <a:lnTo>
-                    <a:pt x="4291241" y="2976765"/>
-                  </a:lnTo>
-                  <a:lnTo>
-                    <a:pt x="4362864" y="2992814"/>
-                  </a:lnTo>
-                  <a:lnTo>
-                    <a:pt x="4434486" y="3008355"/>
-                  </a:lnTo>
-                  <a:lnTo>
-                    <a:pt x="4506109" y="3023405"/>
-                  </a:lnTo>
-                  <a:lnTo>
-                    <a:pt x="4577731" y="3037977"/>
-                  </a:lnTo>
-                  <a:lnTo>
-                    <a:pt x="4649354" y="3052089"/>
-                  </a:lnTo>
-                  <a:lnTo>
-                    <a:pt x="4720976" y="3065753"/>
-                  </a:lnTo>
-                  <a:lnTo>
-                    <a:pt x="4792599" y="3078986"/>
-                  </a:lnTo>
-                  <a:lnTo>
-                    <a:pt x="4864221" y="3091799"/>
-                  </a:lnTo>
-                  <a:lnTo>
-                    <a:pt x="4935844" y="3104206"/>
-                  </a:lnTo>
-                  <a:lnTo>
-                    <a:pt x="5007466" y="3116221"/>
-                  </a:lnTo>
-                  <a:lnTo>
-                    <a:pt x="5079089" y="3127856"/>
-                  </a:lnTo>
-                  <a:lnTo>
-                    <a:pt x="5150711" y="3139122"/>
-                  </a:lnTo>
-                  <a:lnTo>
-                    <a:pt x="5222334" y="3150032"/>
-                  </a:lnTo>
-                  <a:lnTo>
-                    <a:pt x="5293956" y="3160596"/>
-                  </a:lnTo>
-                  <a:lnTo>
-                    <a:pt x="5365579" y="3170825"/>
-                  </a:lnTo>
-                  <a:lnTo>
-                    <a:pt x="5437201" y="3180731"/>
-                  </a:lnTo>
-                  <a:lnTo>
-                    <a:pt x="5508824" y="3190324"/>
-                  </a:lnTo>
-                  <a:lnTo>
-                    <a:pt x="5580447" y="3199612"/>
-                  </a:lnTo>
-                  <a:lnTo>
-                    <a:pt x="5652069" y="3208607"/>
-                  </a:lnTo>
-                  <a:lnTo>
-                    <a:pt x="5723692" y="3217317"/>
-                  </a:lnTo>
-                  <a:lnTo>
-                    <a:pt x="5795314" y="3225751"/>
-                  </a:lnTo>
-                  <a:lnTo>
-                    <a:pt x="5866937" y="3233918"/>
-                  </a:lnTo>
-                  <a:lnTo>
-                    <a:pt x="5938559" y="3241827"/>
-                  </a:lnTo>
-                  <a:lnTo>
-                    <a:pt x="6010182" y="3249485"/>
-                  </a:lnTo>
-                  <a:lnTo>
-                    <a:pt x="6081804" y="3256901"/>
-                  </a:lnTo>
-                  <a:lnTo>
-                    <a:pt x="6153427" y="3264082"/>
-                  </a:lnTo>
-                  <a:lnTo>
-                    <a:pt x="6225049" y="3271036"/>
-                  </a:lnTo>
-                  <a:lnTo>
-                    <a:pt x="6296672" y="3277770"/>
-                  </a:lnTo>
-                  <a:lnTo>
-                    <a:pt x="6368294" y="3284290"/>
-                  </a:lnTo>
-                  <a:lnTo>
-                    <a:pt x="6439917" y="3290604"/>
-                  </a:lnTo>
-                  <a:lnTo>
-                    <a:pt x="6511539" y="3296718"/>
-                  </a:lnTo>
-                  <a:lnTo>
-                    <a:pt x="6583162" y="3302639"/>
-                  </a:lnTo>
-                  <a:lnTo>
-                    <a:pt x="6654784" y="3308372"/>
-                  </a:lnTo>
-                  <a:lnTo>
-                    <a:pt x="6726407" y="3313924"/>
-                  </a:lnTo>
-                  <a:lnTo>
-                    <a:pt x="6798029" y="3319300"/>
-                  </a:lnTo>
-                  <a:lnTo>
-                    <a:pt x="6869652" y="3324506"/>
+                    <a:pt x="59989" y="93004"/>
+                  </a:lnTo>
+                  <a:lnTo>
+                    <a:pt x="131611" y="200523"/>
+                  </a:lnTo>
+                  <a:lnTo>
+                    <a:pt x="203234" y="304633"/>
+                  </a:lnTo>
+                  <a:lnTo>
+                    <a:pt x="274856" y="405442"/>
+                  </a:lnTo>
+                  <a:lnTo>
+                    <a:pt x="346479" y="503053"/>
+                  </a:lnTo>
+                  <a:lnTo>
+                    <a:pt x="418102" y="597570"/>
+                  </a:lnTo>
+                  <a:lnTo>
+                    <a:pt x="489724" y="689090"/>
+                  </a:lnTo>
+                  <a:lnTo>
+                    <a:pt x="561347" y="777707"/>
+                  </a:lnTo>
+                  <a:lnTo>
+                    <a:pt x="632969" y="863515"/>
+                  </a:lnTo>
+                  <a:lnTo>
+                    <a:pt x="704592" y="946601"/>
+                  </a:lnTo>
+                  <a:lnTo>
+                    <a:pt x="776214" y="1027053"/>
+                  </a:lnTo>
+                  <a:lnTo>
+                    <a:pt x="847837" y="1104954"/>
+                  </a:lnTo>
+                  <a:lnTo>
+                    <a:pt x="919459" y="1180385"/>
+                  </a:lnTo>
+                  <a:lnTo>
+                    <a:pt x="991082" y="1253423"/>
+                  </a:lnTo>
+                  <a:lnTo>
+                    <a:pt x="1062704" y="1324146"/>
+                  </a:lnTo>
+                  <a:lnTo>
+                    <a:pt x="1134327" y="1392626"/>
+                  </a:lnTo>
+                  <a:lnTo>
+                    <a:pt x="1205949" y="1458935"/>
+                  </a:lnTo>
+                  <a:lnTo>
+                    <a:pt x="1277572" y="1523141"/>
+                  </a:lnTo>
+                  <a:lnTo>
+                    <a:pt x="1349194" y="1585311"/>
+                  </a:lnTo>
+                  <a:lnTo>
+                    <a:pt x="1420817" y="1645509"/>
+                  </a:lnTo>
+                  <a:lnTo>
+                    <a:pt x="1492439" y="1703799"/>
+                  </a:lnTo>
+                  <a:lnTo>
+                    <a:pt x="1564062" y="1760241"/>
+                  </a:lnTo>
+                  <a:lnTo>
+                    <a:pt x="1635684" y="1814892"/>
+                  </a:lnTo>
+                  <a:lnTo>
+                    <a:pt x="1707307" y="1867811"/>
+                  </a:lnTo>
+                  <a:lnTo>
+                    <a:pt x="1778930" y="1919052"/>
+                  </a:lnTo>
+                  <a:lnTo>
+                    <a:pt x="1850552" y="1968668"/>
+                  </a:lnTo>
+                  <a:lnTo>
+                    <a:pt x="1922175" y="2016710"/>
+                  </a:lnTo>
+                  <a:lnTo>
+                    <a:pt x="1993797" y="2063229"/>
+                  </a:lnTo>
+                  <a:lnTo>
+                    <a:pt x="2065420" y="2108274"/>
+                  </a:lnTo>
+                  <a:lnTo>
+                    <a:pt x="2137042" y="2151889"/>
+                  </a:lnTo>
+                  <a:lnTo>
+                    <a:pt x="2208665" y="2194122"/>
+                  </a:lnTo>
+                  <a:lnTo>
+                    <a:pt x="2280287" y="2235015"/>
+                  </a:lnTo>
+                  <a:lnTo>
+                    <a:pt x="2351910" y="2274612"/>
+                  </a:lnTo>
+                  <a:lnTo>
+                    <a:pt x="2423532" y="2312953"/>
+                  </a:lnTo>
+                  <a:lnTo>
+                    <a:pt x="2495155" y="2350079"/>
+                  </a:lnTo>
+                  <a:lnTo>
+                    <a:pt x="2566777" y="2386027"/>
+                  </a:lnTo>
+                  <a:lnTo>
+                    <a:pt x="2638400" y="2420835"/>
+                  </a:lnTo>
+                  <a:lnTo>
+                    <a:pt x="2710022" y="2454540"/>
+                  </a:lnTo>
+                  <a:lnTo>
+                    <a:pt x="2781645" y="2487176"/>
+                  </a:lnTo>
+                  <a:lnTo>
+                    <a:pt x="2853267" y="2518776"/>
+                  </a:lnTo>
+                  <a:lnTo>
+                    <a:pt x="2924890" y="2549375"/>
+                  </a:lnTo>
+                  <a:lnTo>
+                    <a:pt x="2996512" y="2579004"/>
+                  </a:lnTo>
+                  <a:lnTo>
+                    <a:pt x="3068135" y="2607693"/>
+                  </a:lnTo>
+                  <a:lnTo>
+                    <a:pt x="3139758" y="2635472"/>
+                  </a:lnTo>
+                  <a:lnTo>
+                    <a:pt x="3211380" y="2662371"/>
+                  </a:lnTo>
+                  <a:lnTo>
+                    <a:pt x="3283003" y="2688416"/>
+                  </a:lnTo>
+                  <a:lnTo>
+                    <a:pt x="3354625" y="2713636"/>
+                  </a:lnTo>
+                  <a:lnTo>
+                    <a:pt x="3426248" y="2738056"/>
+                  </a:lnTo>
+                  <a:lnTo>
+                    <a:pt x="3497870" y="2761701"/>
+                  </a:lnTo>
+                  <a:lnTo>
+                    <a:pt x="3569493" y="2784597"/>
+                  </a:lnTo>
+                  <a:lnTo>
+                    <a:pt x="3641115" y="2806767"/>
+                  </a:lnTo>
+                  <a:lnTo>
+                    <a:pt x="3712738" y="2828234"/>
+                  </a:lnTo>
+                  <a:lnTo>
+                    <a:pt x="3784360" y="2849020"/>
+                  </a:lnTo>
+                  <a:lnTo>
+                    <a:pt x="3855983" y="2869147"/>
+                  </a:lnTo>
+                  <a:lnTo>
+                    <a:pt x="3927605" y="2888635"/>
+                  </a:lnTo>
+                  <a:lnTo>
+                    <a:pt x="3999228" y="2907506"/>
+                  </a:lnTo>
+                  <a:lnTo>
+                    <a:pt x="4070850" y="2925778"/>
+                  </a:lnTo>
+                  <a:lnTo>
+                    <a:pt x="4142473" y="2943471"/>
+                  </a:lnTo>
+                  <a:lnTo>
+                    <a:pt x="4214095" y="2960603"/>
+                  </a:lnTo>
+                  <a:lnTo>
+                    <a:pt x="4285718" y="2977192"/>
+                  </a:lnTo>
+                  <a:lnTo>
+                    <a:pt x="4357340" y="2993255"/>
+                  </a:lnTo>
+                  <a:lnTo>
+                    <a:pt x="4428963" y="3008808"/>
+                  </a:lnTo>
+                  <a:lnTo>
+                    <a:pt x="4500585" y="3023868"/>
+                  </a:lnTo>
+                  <a:lnTo>
+                    <a:pt x="4572208" y="3038451"/>
+                  </a:lnTo>
+                  <a:lnTo>
+                    <a:pt x="4643831" y="3052571"/>
+                  </a:lnTo>
+                  <a:lnTo>
+                    <a:pt x="4715453" y="3066243"/>
+                  </a:lnTo>
+                  <a:lnTo>
+                    <a:pt x="4787076" y="3079482"/>
+                  </a:lnTo>
+                  <a:lnTo>
+                    <a:pt x="4858698" y="3092301"/>
+                  </a:lnTo>
+                  <a:lnTo>
+                    <a:pt x="4930321" y="3104714"/>
+                  </a:lnTo>
+                  <a:lnTo>
+                    <a:pt x="5001943" y="3116733"/>
+                  </a:lnTo>
+                  <a:lnTo>
+                    <a:pt x="5073566" y="3128371"/>
+                  </a:lnTo>
+                  <a:lnTo>
+                    <a:pt x="5145188" y="3139639"/>
+                  </a:lnTo>
+                  <a:lnTo>
+                    <a:pt x="5216811" y="3150551"/>
+                  </a:lnTo>
+                  <a:lnTo>
+                    <a:pt x="5288433" y="3161116"/>
+                  </a:lnTo>
+                  <a:lnTo>
+                    <a:pt x="5360056" y="3171347"/>
+                  </a:lnTo>
+                  <a:lnTo>
+                    <a:pt x="5431678" y="3181253"/>
+                  </a:lnTo>
+                  <a:lnTo>
+                    <a:pt x="5503301" y="3190845"/>
+                  </a:lnTo>
+                  <a:lnTo>
+                    <a:pt x="5574923" y="3200133"/>
+                  </a:lnTo>
+                  <a:lnTo>
+                    <a:pt x="5646546" y="3209126"/>
+                  </a:lnTo>
+                  <a:lnTo>
+                    <a:pt x="5718168" y="3217834"/>
+                  </a:lnTo>
+                  <a:lnTo>
+                    <a:pt x="5789791" y="3226266"/>
+                  </a:lnTo>
+                  <a:lnTo>
+                    <a:pt x="5861413" y="3234431"/>
+                  </a:lnTo>
+                  <a:lnTo>
+                    <a:pt x="5933036" y="3242336"/>
+                  </a:lnTo>
+                  <a:lnTo>
+                    <a:pt x="6004659" y="3249991"/>
+                  </a:lnTo>
+                  <a:lnTo>
+                    <a:pt x="6076281" y="3257404"/>
+                  </a:lnTo>
+                  <a:lnTo>
+                    <a:pt x="6147904" y="3264581"/>
+                  </a:lnTo>
+                  <a:lnTo>
+                    <a:pt x="6219526" y="3271531"/>
+                  </a:lnTo>
+                  <a:lnTo>
+                    <a:pt x="6291149" y="3278260"/>
+                  </a:lnTo>
+                  <a:lnTo>
+                    <a:pt x="6362771" y="3284776"/>
+                  </a:lnTo>
+                  <a:lnTo>
+                    <a:pt x="6434394" y="3291085"/>
+                  </a:lnTo>
+                  <a:lnTo>
+                    <a:pt x="6506016" y="3297194"/>
+                  </a:lnTo>
+                  <a:lnTo>
+                    <a:pt x="6577639" y="3303110"/>
+                  </a:lnTo>
+                  <a:lnTo>
+                    <a:pt x="6649261" y="3308838"/>
+                  </a:lnTo>
+                  <a:lnTo>
+                    <a:pt x="6720884" y="3314384"/>
+                  </a:lnTo>
+                  <a:lnTo>
+                    <a:pt x="6792506" y="3319754"/>
+                  </a:lnTo>
+                  <a:lnTo>
+                    <a:pt x="6864129" y="3324955"/>
                   </a:lnTo>
                 </a:path>
               </a:pathLst>
@@ -5006,7 +5000,7 @@
                   <a:latin typeface="Helvetica"/>
                   <a:cs typeface="Helvetica"/>
                 </a:rPr>
-                <a:t>subHR per 10 % decline: 1.47 (1.05-2.07), p = 0.026  |  per IQR decline (Δ = 29.3 %): 3.10 (1.14-8.41)  |  IQR: [-14.6, 14.7] %</a:t>
+                <a:t>subHR per 10 % decline: 1.47 (1.05-2.07), p = 0.026  |  per IQR decline (Δ = 29.3 %): 3.11 (1.14-8.43)  |  IQR: [-14.6, 14.7] %</a:t>
               </a:r>
             </a:p>
           </p:txBody>
